--- a/03-build/pptx/C4_U1_docente.pptx
+++ b/03-build/pptx/C4_U1_docente.pptx
@@ -22365,34 +22365,34 @@
         <a:sysClr val="window" lastClr="FFFFFF"/>
       </a:lt1>
       <a:dk2>
-        <a:srgbClr val="1F497D"/>
+        <a:srgbClr val="20242E"/>
       </a:dk2>
       <a:lt2>
-        <a:srgbClr val="EEECE1"/>
+        <a:srgbClr val="F3EEE4"/>
       </a:lt2>
       <a:accent1>
-        <a:srgbClr val="4F81BD"/>
+        <a:srgbClr val="D64550"/>
       </a:accent1>
       <a:accent2>
-        <a:srgbClr val="C0504D"/>
+        <a:srgbClr val="A8323B"/>
       </a:accent2>
       <a:accent3>
-        <a:srgbClr val="9BBB59"/>
+        <a:srgbClr val="C25A63"/>
       </a:accent3>
       <a:accent4>
-        <a:srgbClr val="8064A2"/>
+        <a:srgbClr val="E08A90"/>
       </a:accent4>
       <a:accent5>
-        <a:srgbClr val="4BACC6"/>
+        <a:srgbClr val="9D2A33"/>
       </a:accent5>
       <a:accent6>
-        <a:srgbClr val="F79646"/>
+        <a:srgbClr val="FBEAEC"/>
       </a:accent6>
       <a:hlink>
-        <a:srgbClr val="0000FF"/>
+        <a:srgbClr val="A8323B"/>
       </a:hlink>
       <a:folHlink>
-        <a:srgbClr val="800080"/>
+        <a:srgbClr val="D64550"/>
       </a:folHlink>
     </a:clrScheme>
     <a:fontScheme name="Office">
@@ -22685,34 +22685,34 @@
         <a:sysClr val="window" lastClr="FFFFFF"/>
       </a:lt1>
       <a:dk2>
-        <a:srgbClr val="1F497D"/>
+        <a:srgbClr val="20242E"/>
       </a:dk2>
       <a:lt2>
-        <a:srgbClr val="EEECE1"/>
+        <a:srgbClr val="F3EEE4"/>
       </a:lt2>
       <a:accent1>
-        <a:srgbClr val="4F81BD"/>
+        <a:srgbClr val="D64550"/>
       </a:accent1>
       <a:accent2>
-        <a:srgbClr val="C0504D"/>
+        <a:srgbClr val="A8323B"/>
       </a:accent2>
       <a:accent3>
-        <a:srgbClr val="9BBB59"/>
+        <a:srgbClr val="C25A63"/>
       </a:accent3>
       <a:accent4>
-        <a:srgbClr val="8064A2"/>
+        <a:srgbClr val="E08A90"/>
       </a:accent4>
       <a:accent5>
-        <a:srgbClr val="4BACC6"/>
+        <a:srgbClr val="9D2A33"/>
       </a:accent5>
       <a:accent6>
-        <a:srgbClr val="F79646"/>
+        <a:srgbClr val="FBEAEC"/>
       </a:accent6>
       <a:hlink>
-        <a:srgbClr val="0000FF"/>
+        <a:srgbClr val="A8323B"/>
       </a:hlink>
       <a:folHlink>
-        <a:srgbClr val="800080"/>
+        <a:srgbClr val="D64550"/>
       </a:folHlink>
     </a:clrScheme>
     <a:fontScheme name="Office">

--- a/03-build/pptx/C4_U1_docente.pptx
+++ b/03-build/pptx/C4_U1_docente.pptx
@@ -12628,7 +12628,7 @@
         <p:spPr>
           <a:xfrm>
             <a:off x="7498079" y="1417320"/>
-            <a:ext cx="4206240" cy="3108960"/>
+            <a:ext cx="4206240" cy="2240280"/>
           </a:xfrm>
           <a:prstGeom prst="roundRect">
             <a:avLst>
@@ -12682,8 +12682,8 @@
         </p:nvSpPr>
         <p:spPr>
           <a:xfrm>
-            <a:off x="7726679" y="1600200"/>
-            <a:ext cx="3749039" cy="2834640"/>
+            <a:off x="7726679" y="1572768"/>
+            <a:ext cx="3749039" cy="2011680"/>
           </a:xfrm>
           <a:prstGeom prst="rect">
             <a:avLst/>
@@ -12708,7 +12708,7 @@
               </a:spcAft>
             </a:pPr>
             <a:r>
-              <a:rPr sz="1400" b="1" i="0">
+              <a:rPr sz="1300" b="1" i="0">
                 <a:solidFill>
                   <a:srgbClr val="A8323B"/>
                 </a:solidFill>
@@ -12730,7 +12730,7 @@
               </a:spcAft>
             </a:pPr>
             <a:r>
-              <a:rPr sz="1300" b="0" i="0">
+              <a:rPr sz="1150" b="0" i="0">
                 <a:solidFill>
                   <a:srgbClr val="20242E"/>
                 </a:solidFill>
@@ -12752,7 +12752,7 @@
               </a:spcAft>
             </a:pPr>
             <a:r>
-              <a:rPr sz="1300" b="0" i="0">
+              <a:rPr sz="1150" b="0" i="0">
                 <a:solidFill>
                   <a:srgbClr val="20242E"/>
                 </a:solidFill>
@@ -12774,7 +12774,7 @@
               </a:spcAft>
             </a:pPr>
             <a:r>
-              <a:rPr sz="1300" b="0" i="0">
+              <a:rPr sz="1150" b="0" i="0">
                 <a:solidFill>
                   <a:srgbClr val="20242E"/>
                 </a:solidFill>
@@ -12796,104 +12796,27 @@
               </a:spcAft>
             </a:pPr>
             <a:r>
-              <a:rPr sz="1300" b="0" i="0">
+              <a:rPr sz="1150" b="0" i="0">
                 <a:solidFill>
                   <a:srgbClr val="20242E"/>
                 </a:solidFill>
                 <a:latin typeface="Inter"/>
               </a:rPr>
-              <a:t>Muchas gracias · De nada</a:t>
-            </a:r>
-          </a:p>
-          <a:p>
-            <a:pPr algn="l">
-              <a:lnSpc>
-                <a:spcPct val="106000"/>
-              </a:lnSpc>
-              <a:spcBef>
-                <a:spcPts val="0"/>
-              </a:spcBef>
-              <a:spcAft>
-                <a:spcPts val="200"/>
-              </a:spcAft>
-            </a:pPr>
-            <a:r>
-              <a:rPr sz="1300" b="0" i="0">
-                <a:solidFill>
-                  <a:srgbClr val="20242E"/>
-                </a:solidFill>
-                <a:latin typeface="Inter"/>
-              </a:rPr>
-              <a:t>¡Bienvenida! · Hasta luego · Adiós</a:t>
-            </a:r>
-          </a:p>
-        </p:txBody>
-      </p:sp>
-      <p:sp>
-        <p:nvSpPr>
-          <p:cNvPr id="28" name="Rounded Rectangle 27"/>
-          <p:cNvSpPr/>
-          <p:nvPr/>
-        </p:nvSpPr>
-        <p:spPr>
-          <a:xfrm>
-            <a:off x="7498079" y="4663440"/>
-            <a:ext cx="4206240" cy="1234440"/>
-          </a:xfrm>
-          <a:prstGeom prst="roundRect">
-            <a:avLst>
-              <a:gd name="adj" fmla="val 5500"/>
-            </a:avLst>
-          </a:prstGeom>
-          <a:solidFill>
-            <a:srgbClr val="FFFFFF"/>
-          </a:solidFill>
-          <a:ln w="15240">
-            <a:solidFill>
-              <a:srgbClr val="E4E3DE"/>
-            </a:solidFill>
-          </a:ln>
-          <a:effectLst/>
-          <a:effectLst>
-            <a:outerShdw blurRad="90000" dist="38000" dir="5400000" rotWithShape="0">
-              <a:srgbClr val="20242E">
-                <a:alpha val="22000"/>
-              </a:srgbClr>
-            </a:outerShdw>
-          </a:effectLst>
-        </p:spPr>
-        <p:style>
-          <a:lnRef idx="1">
-            <a:schemeClr val="accent1"/>
-          </a:lnRef>
-          <a:fillRef idx="3">
-            <a:schemeClr val="accent1"/>
-          </a:fillRef>
-          <a:effectRef idx="2">
-            <a:schemeClr val="accent1"/>
-          </a:effectRef>
-          <a:fontRef idx="minor">
-            <a:schemeClr val="lt1"/>
-          </a:fontRef>
-        </p:style>
-        <p:txBody>
-          <a:bodyPr rtlCol="0" anchor="ctr"/>
-          <a:lstStyle/>
-          <a:p>
-            <a:pPr algn="ctr"/>
-          </a:p>
-        </p:txBody>
-      </p:sp>
-      <p:sp>
-        <p:nvSpPr>
-          <p:cNvPr id="29" name="TextBox 28"/>
+              <a:t>Muchas gracias · Hasta luego · Adiós</a:t>
+            </a:r>
+          </a:p>
+        </p:txBody>
+      </p:sp>
+      <p:sp>
+        <p:nvSpPr>
+          <p:cNvPr id="28" name="TextBox 27"/>
           <p:cNvSpPr txBox="1"/>
           <p:nvPr/>
         </p:nvSpPr>
         <p:spPr>
           <a:xfrm>
-            <a:off x="7726679" y="4800600"/>
-            <a:ext cx="3749039" cy="1005840"/>
+            <a:off x="7498079" y="3767328"/>
+            <a:ext cx="4206240" cy="274320"/>
           </a:xfrm>
           <a:prstGeom prst="rect">
             <a:avLst/>
@@ -12918,39 +12841,50 @@
               </a:spcAft>
             </a:pPr>
             <a:r>
-              <a:rPr sz="1200" b="1" i="0">
+              <a:rPr sz="1100" b="1" i="0">
                 <a:solidFill>
                   <a:srgbClr val="A8323B"/>
                 </a:solidFill>
                 <a:latin typeface="Bricolage Grotesque"/>
               </a:rPr>
-              <a:t>🎬 Vídeo online</a:t>
-            </a:r>
-          </a:p>
-          <a:p>
-            <a:pPr algn="l">
-              <a:lnSpc>
-                <a:spcPct val="106000"/>
-              </a:lnSpc>
-              <a:spcBef>
-                <a:spcPts val="0"/>
-              </a:spcBef>
-              <a:spcAft>
-                <a:spcPts val="200"/>
-              </a:spcAft>
-            </a:pPr>
-            <a:r>
-              <a:rPr sz="1100" b="0" i="0">
-                <a:solidFill>
-                  <a:srgbClr val="6A6E78"/>
-                </a:solidFill>
-                <a:latin typeface="Inter"/>
-              </a:rPr>
-              <a:t>Scan de QR op de cursus of open de digitale hub → tabblad Escucha.</a:t>
-            </a:r>
-          </a:p>
-        </p:txBody>
-      </p:sp>
+              <a:t>🎬 Sitcom · Episodio 1 — klik om af te spelen</a:t>
+            </a:r>
+          </a:p>
+        </p:txBody>
+      </p:sp>
+      <p:pic>
+        <p:nvPicPr>
+          <p:cNvPr id="29" name="Picture 28" descr="video_poster_U1.png">
+            <a:hlinkClick r:id="" action="ppaction://media"/>
+          </p:cNvPr>
+          <p:cNvPicPr>
+            <a:picLocks noChangeAspect="1"/>
+          </p:cNvPicPr>
+          <p:nvPr>
+            <a:videoFile r:link="rId3"/>
+            <p:extLst>
+              <p:ext uri="{DAA4B4D4-6D71-4841-9C94-3DE7FCFB9230}">
+                <p14:media xmlns:p14="http://schemas.microsoft.com/office/powerpoint/2010/main" r:embed="rId4"/>
+              </p:ext>
+            </p:extLst>
+          </p:nvPr>
+        </p:nvPicPr>
+        <p:blipFill>
+          <a:blip r:embed="rId2"/>
+          <a:stretch>
+            <a:fillRect/>
+          </a:stretch>
+        </p:blipFill>
+        <p:spPr>
+          <a:xfrm>
+            <a:off x="7498079" y="4069080"/>
+            <a:ext cx="4206240" cy="2331720"/>
+          </a:xfrm>
+          <a:prstGeom prst="rect">
+            <a:avLst/>
+          </a:prstGeom>
+        </p:spPr>
+      </p:pic>
       <p:sp>
         <p:nvSpPr>
           <p:cNvPr id="30" name="Rectangle 29"/>

--- a/03-build/pptx/C4_U1_docente.pptx
+++ b/03-build/pptx/C4_U1_docente.pptx
@@ -19,6 +19,7 @@
     <p:sldId id="267" r:id="rId19"/>
     <p:sldId id="268" r:id="rId20"/>
     <p:sldId id="269" r:id="rId21"/>
+    <p:sldId id="270" r:id="rId22"/>
   </p:sldIdLst>
   <p:sldSz cx="12191695" cy="6858000" type="screen4x3"/>
   <p:notesSz cx="6858000" cy="9144000"/>
@@ -7867,7 +7868,7 @@
         <p:spPr>
           <a:xfrm>
             <a:off x="502920" y="182880"/>
-            <a:ext cx="623620" cy="292608"/>
+            <a:ext cx="875995" cy="292608"/>
           </a:xfrm>
           <a:prstGeom prst="roundRect">
             <a:avLst>
@@ -7908,7 +7909,7 @@
                 </a:solidFill>
                 <a:latin typeface="Inter"/>
               </a:rPr>
-              <a:t>REPASO</a:t>
+              <a:t>FUNCIONES</a:t>
             </a:r>
           </a:p>
         </p:txBody>
@@ -7953,7 +7954,7 @@
                 </a:solidFill>
                 <a:latin typeface="Bricolage Grotesque"/>
               </a:rPr>
-              <a:t>Lo esencial de un vistazo</a:t>
+              <a:t>Mis funciones comunicativas</a:t>
             </a:r>
           </a:p>
         </p:txBody>
@@ -7998,76 +7999,21 @@
                 </a:solidFill>
                 <a:latin typeface="Inter"/>
               </a:rPr>
-              <a:t>Wat je nu kunt — semáforo</a:t>
-            </a:r>
-          </a:p>
-        </p:txBody>
-      </p:sp>
-      <p:sp>
-        <p:nvSpPr>
-          <p:cNvPr id="8" name="Rounded Rectangle 7"/>
-          <p:cNvSpPr/>
-          <p:nvPr/>
-        </p:nvSpPr>
-        <p:spPr>
-          <a:xfrm>
-            <a:off x="502920" y="1554480"/>
-            <a:ext cx="6949440" cy="4023360"/>
-          </a:xfrm>
-          <a:prstGeom prst="roundRect">
-            <a:avLst>
-              <a:gd name="adj" fmla="val 5500"/>
-            </a:avLst>
-          </a:prstGeom>
-          <a:solidFill>
-            <a:srgbClr val="FFFFFF"/>
-          </a:solidFill>
-          <a:ln w="15240">
-            <a:solidFill>
-              <a:srgbClr val="E4E3DE"/>
-            </a:solidFill>
-          </a:ln>
-          <a:effectLst/>
-          <a:effectLst>
-            <a:outerShdw blurRad="90000" dist="38000" dir="5400000" rotWithShape="0">
-              <a:srgbClr val="20242E">
-                <a:alpha val="22000"/>
-              </a:srgbClr>
-            </a:outerShdw>
-          </a:effectLst>
-        </p:spPr>
-        <p:style>
-          <a:lnRef idx="1">
-            <a:schemeClr val="accent1"/>
-          </a:lnRef>
-          <a:fillRef idx="3">
-            <a:schemeClr val="accent1"/>
-          </a:fillRef>
-          <a:effectRef idx="2">
-            <a:schemeClr val="accent1"/>
-          </a:effectRef>
-          <a:fontRef idx="minor">
-            <a:schemeClr val="lt1"/>
-          </a:fontRef>
-        </p:style>
-        <p:txBody>
-          <a:bodyPr rtlCol="0" anchor="ctr"/>
-          <a:lstStyle/>
-          <a:p>
-            <a:pPr algn="ctr"/>
-          </a:p>
-        </p:txBody>
-      </p:sp>
-      <p:sp>
-        <p:nvSpPr>
-          <p:cNvPr id="9" name="TextBox 8"/>
+              <a:t>Lo que ya sé hacer — crece cada unidad</a:t>
+            </a:r>
+          </a:p>
+        </p:txBody>
+      </p:sp>
+      <p:sp>
+        <p:nvSpPr>
+          <p:cNvPr id="8" name="TextBox 7"/>
           <p:cNvSpPr txBox="1"/>
           <p:nvPr/>
         </p:nvSpPr>
         <p:spPr>
           <a:xfrm>
-            <a:off x="777240" y="1737360"/>
-            <a:ext cx="6492240" cy="3657600"/>
+            <a:off x="548640" y="1298448"/>
+            <a:ext cx="11155680" cy="320040"/>
           </a:xfrm>
           <a:prstGeom prst="rect">
             <a:avLst/>
@@ -8092,181 +8038,36 @@
               </a:spcAft>
             </a:pPr>
             <a:r>
-              <a:rPr sz="1400" b="1" i="0">
+              <a:rPr sz="1300" b="1" i="0">
                 <a:solidFill>
                   <a:srgbClr val="A8323B"/>
                 </a:solidFill>
                 <a:latin typeface="Bricolage Grotesque"/>
               </a:rPr>
-              <a:t>Zo groet &amp; stel je je voor</a:t>
-            </a:r>
-          </a:p>
-          <a:p>
-            <a:pPr algn="l">
-              <a:lnSpc>
-                <a:spcPct val="106000"/>
-              </a:lnSpc>
-              <a:spcBef>
-                <a:spcPts val="0"/>
-              </a:spcBef>
-              <a:spcAft>
-                <a:spcPts val="200"/>
-              </a:spcAft>
-            </a:pPr>
-            <a:r>
-              <a:rPr sz="1400" b="0" i="0">
-                <a:solidFill>
-                  <a:srgbClr val="20242E"/>
-                </a:solidFill>
-                <a:latin typeface="Inter"/>
-              </a:rPr>
-              <a:t>¡Hola! Me llamo ___. Soy de ___. Encantad_.</a:t>
-            </a:r>
-          </a:p>
-          <a:p>
-            <a:pPr algn="l">
-              <a:lnSpc>
-                <a:spcPct val="106000"/>
-              </a:lnSpc>
-              <a:spcBef>
-                <a:spcPts val="0"/>
-              </a:spcBef>
-              <a:spcAft>
-                <a:spcPts val="200"/>
-              </a:spcAft>
-            </a:pPr>
-            <a:r>
-              <a:rPr sz="1400" b="0" i="0">
-                <a:solidFill>
-                  <a:srgbClr val="20242E"/>
-                </a:solidFill>
-                <a:latin typeface="Inter"/>
-              </a:rPr>
-              <a:t>¿Y tú, cómo te llamas?</a:t>
-            </a:r>
-          </a:p>
-          <a:p>
-            <a:pPr algn="l">
-              <a:lnSpc>
-                <a:spcPct val="106000"/>
-              </a:lnSpc>
-              <a:spcBef>
-                <a:spcPts val="0"/>
-              </a:spcBef>
-              <a:spcAft>
-                <a:spcPts val="200"/>
-              </a:spcAft>
-            </a:pPr>
-            <a:r>
-              <a:rPr sz="600" b="0" i="0">
-                <a:solidFill>
-                  <a:srgbClr val="20242E"/>
-                </a:solidFill>
-                <a:latin typeface="Inter"/>
-              </a:rPr>
-              <a:t/>
-            </a:r>
-          </a:p>
-          <a:p>
-            <a:pPr algn="l">
-              <a:lnSpc>
-                <a:spcPct val="106000"/>
-              </a:lnSpc>
-              <a:spcBef>
-                <a:spcPts val="0"/>
-              </a:spcBef>
-              <a:spcAft>
-                <a:spcPts val="200"/>
-              </a:spcAft>
-            </a:pPr>
-            <a:r>
-              <a:rPr sz="1400" b="1" i="0">
-                <a:solidFill>
-                  <a:srgbClr val="A8323B"/>
-                </a:solidFill>
-                <a:latin typeface="Bricolage Grotesque"/>
-              </a:rPr>
-              <a:t>Onthou</a:t>
-            </a:r>
-          </a:p>
-          <a:p>
-            <a:pPr algn="l">
-              <a:lnSpc>
-                <a:spcPct val="106000"/>
-              </a:lnSpc>
-              <a:spcBef>
-                <a:spcPts val="0"/>
-              </a:spcBef>
-              <a:spcAft>
-                <a:spcPts val="200"/>
-              </a:spcAft>
-            </a:pPr>
-            <a:r>
-              <a:rPr sz="1300" b="0" i="0">
-                <a:solidFill>
-                  <a:srgbClr val="20242E"/>
-                </a:solidFill>
-                <a:latin typeface="Inter"/>
-              </a:rPr>
-              <a:t>ser: soy · eres · es</a:t>
-            </a:r>
-          </a:p>
-          <a:p>
-            <a:pPr algn="l">
-              <a:lnSpc>
-                <a:spcPct val="106000"/>
-              </a:lnSpc>
-              <a:spcBef>
-                <a:spcPts val="0"/>
-              </a:spcBef>
-              <a:spcAft>
-                <a:spcPts val="200"/>
-              </a:spcAft>
-            </a:pPr>
-            <a:r>
-              <a:rPr sz="1300" b="0" i="0">
-                <a:solidFill>
-                  <a:srgbClr val="20242E"/>
-                </a:solidFill>
-                <a:latin typeface="Inter"/>
-              </a:rPr>
-              <a:t>llamarse: me/te/se + llamo/llamas/llama</a:t>
-            </a:r>
-          </a:p>
-          <a:p>
-            <a:pPr algn="l">
-              <a:lnSpc>
-                <a:spcPct val="106000"/>
-              </a:lnSpc>
-              <a:spcBef>
-                <a:spcPts val="0"/>
-              </a:spcBef>
-              <a:spcAft>
-                <a:spcPts val="200"/>
-              </a:spcAft>
-            </a:pPr>
-            <a:r>
-              <a:rPr sz="1300" b="0" i="0">
-                <a:solidFill>
-                  <a:srgbClr val="20242E"/>
-                </a:solidFill>
-                <a:latin typeface="Inter"/>
-              </a:rPr>
-              <a:t>-o = ♂ · -a = ♀   |   tú = vriend · usted = beleefd</a:t>
-            </a:r>
-          </a:p>
-        </p:txBody>
-      </p:sp>
-      <p:sp>
-        <p:nvSpPr>
-          <p:cNvPr id="10" name="Rounded Rectangle 9"/>
+              <a:t>Mi repertorio: 4 / 8 funciones — </a:t>
+            </a:r>
+            <a:r>
+              <a:rPr sz="1200" b="0" i="0">
+                <a:solidFill>
+                  <a:srgbClr val="6A6E78"/>
+                </a:solidFill>
+                <a:latin typeface="Inter"/>
+              </a:rPr>
+              <a:t>no solo palabras: lo que puedo HACER con el español.</a:t>
+            </a:r>
+          </a:p>
+        </p:txBody>
+      </p:sp>
+      <p:sp>
+        <p:nvSpPr>
+          <p:cNvPr id="9" name="Rounded Rectangle 8"/>
           <p:cNvSpPr/>
           <p:nvPr/>
         </p:nvSpPr>
         <p:spPr>
           <a:xfrm>
-            <a:off x="7680960" y="1554480"/>
-            <a:ext cx="4023360" cy="4023360"/>
+            <a:off x="502920" y="1691640"/>
+            <a:ext cx="5394960" cy="1060704"/>
           </a:xfrm>
           <a:prstGeom prst="roundRect">
             <a:avLst>
@@ -8314,14 +8115,14 @@
       </p:sp>
       <p:sp>
         <p:nvSpPr>
-          <p:cNvPr id="11" name="TextBox 10"/>
+          <p:cNvPr id="10" name="TextBox 9"/>
           <p:cNvSpPr txBox="1"/>
           <p:nvPr/>
         </p:nvSpPr>
         <p:spPr>
           <a:xfrm>
-            <a:off x="7909560" y="1737360"/>
-            <a:ext cx="3566160" cy="457200"/>
+            <a:off x="704088" y="1801368"/>
+            <a:ext cx="4992624" cy="365760"/>
           </a:xfrm>
           <a:prstGeom prst="rect">
             <a:avLst/>
@@ -8346,27 +8147,36 @@
               </a:spcAft>
             </a:pPr>
             <a:r>
-              <a:rPr sz="1300" b="1" i="0">
+              <a:rPr sz="1250" b="1" i="0">
+                <a:solidFill>
+                  <a:srgbClr val="20242E"/>
+                </a:solidFill>
+                <a:latin typeface="Bricolage Grotesque"/>
+              </a:rPr>
+              <a:t>Saludar y despedirse</a:t>
+            </a:r>
+            <a:r>
+              <a:rPr sz="900" b="1" i="0">
                 <a:solidFill>
                   <a:srgbClr val="A8323B"/>
                 </a:solidFill>
-                <a:latin typeface="Bricolage Grotesque"/>
-              </a:rPr>
-              <a:t>Puedo… · Ik kan…</a:t>
-            </a:r>
-          </a:p>
-        </p:txBody>
-      </p:sp>
-      <p:sp>
-        <p:nvSpPr>
-          <p:cNvPr id="12" name="TextBox 11"/>
+                <a:latin typeface="Inter"/>
+              </a:rPr>
+              <a:t>  ● NUEVA</a:t>
+            </a:r>
+          </a:p>
+        </p:txBody>
+      </p:sp>
+      <p:sp>
+        <p:nvSpPr>
+          <p:cNvPr id="11" name="TextBox 10"/>
           <p:cNvSpPr txBox="1"/>
           <p:nvPr/>
         </p:nvSpPr>
         <p:spPr>
           <a:xfrm>
-            <a:off x="7909560" y="2331720"/>
-            <a:ext cx="3566160" cy="457200"/>
+            <a:off x="704088" y="2194560"/>
+            <a:ext cx="4992624" cy="502920"/>
           </a:xfrm>
           <a:prstGeom prst="rect">
             <a:avLst/>
@@ -8391,23 +8201,69 @@
               </a:spcAft>
             </a:pPr>
             <a:r>
-              <a:rPr sz="1200" b="0" i="0">
-                <a:solidFill>
-                  <a:srgbClr val="20242E"/>
-                </a:solidFill>
-                <a:latin typeface="Inter"/>
-              </a:rPr>
-              <a:t>🟢🟡🔴  </a:t>
-            </a:r>
-            <a:r>
-              <a:rPr sz="1200" b="0" i="0">
-                <a:solidFill>
-                  <a:srgbClr val="20242E"/>
-                </a:solidFill>
-                <a:latin typeface="Inter"/>
-              </a:rPr>
-              <a:t>groeten &amp; afscheid nemen</a:t>
-            </a:r>
+              <a:rPr sz="900" b="0" i="0">
+                <a:solidFill>
+                  <a:srgbClr val="6A6E78"/>
+                </a:solidFill>
+                <a:latin typeface="Inter"/>
+              </a:rPr>
+              <a:t>Hola · Adiós · Hasta luego</a:t>
+            </a:r>
+          </a:p>
+        </p:txBody>
+      </p:sp>
+      <p:sp>
+        <p:nvSpPr>
+          <p:cNvPr id="12" name="Rounded Rectangle 11"/>
+          <p:cNvSpPr/>
+          <p:nvPr/>
+        </p:nvSpPr>
+        <p:spPr>
+          <a:xfrm>
+            <a:off x="6263640" y="1691640"/>
+            <a:ext cx="5394960" cy="1060704"/>
+          </a:xfrm>
+          <a:prstGeom prst="roundRect">
+            <a:avLst>
+              <a:gd name="adj" fmla="val 5500"/>
+            </a:avLst>
+          </a:prstGeom>
+          <a:solidFill>
+            <a:srgbClr val="FBEAEC"/>
+          </a:solidFill>
+          <a:ln w="15240">
+            <a:solidFill>
+              <a:srgbClr val="D64550"/>
+            </a:solidFill>
+          </a:ln>
+          <a:effectLst/>
+          <a:effectLst>
+            <a:outerShdw blurRad="90000" dist="38000" dir="5400000" rotWithShape="0">
+              <a:srgbClr val="20242E">
+                <a:alpha val="22000"/>
+              </a:srgbClr>
+            </a:outerShdw>
+          </a:effectLst>
+        </p:spPr>
+        <p:style>
+          <a:lnRef idx="1">
+            <a:schemeClr val="accent1"/>
+          </a:lnRef>
+          <a:fillRef idx="3">
+            <a:schemeClr val="accent1"/>
+          </a:fillRef>
+          <a:effectRef idx="2">
+            <a:schemeClr val="accent1"/>
+          </a:effectRef>
+          <a:fontRef idx="minor">
+            <a:schemeClr val="lt1"/>
+          </a:fontRef>
+        </p:style>
+        <p:txBody>
+          <a:bodyPr rtlCol="0" anchor="ctr"/>
+          <a:lstStyle/>
+          <a:p>
+            <a:pPr algn="ctr"/>
           </a:p>
         </p:txBody>
       </p:sp>
@@ -8419,8 +8275,8 @@
         </p:nvSpPr>
         <p:spPr>
           <a:xfrm>
-            <a:off x="7909560" y="2898648"/>
-            <a:ext cx="3566160" cy="457200"/>
+            <a:off x="6464808" y="1801368"/>
+            <a:ext cx="4992624" cy="365760"/>
           </a:xfrm>
           <a:prstGeom prst="rect">
             <a:avLst/>
@@ -8445,22 +8301,22 @@
               </a:spcAft>
             </a:pPr>
             <a:r>
-              <a:rPr sz="1200" b="0" i="0">
+              <a:rPr sz="1250" b="1" i="0">
                 <a:solidFill>
                   <a:srgbClr val="20242E"/>
                 </a:solidFill>
-                <a:latin typeface="Inter"/>
-              </a:rPr>
-              <a:t>🟢🟡🔴  </a:t>
-            </a:r>
-            <a:r>
-              <a:rPr sz="1200" b="0" i="0">
-                <a:solidFill>
-                  <a:srgbClr val="20242E"/>
-                </a:solidFill>
-                <a:latin typeface="Inter"/>
-              </a:rPr>
-              <a:t>mezelf voorstellen</a:t>
+                <a:latin typeface="Bricolage Grotesque"/>
+              </a:rPr>
+              <a:t>Presentarse (decir quién soy)</a:t>
+            </a:r>
+            <a:r>
+              <a:rPr sz="900" b="1" i="0">
+                <a:solidFill>
+                  <a:srgbClr val="A8323B"/>
+                </a:solidFill>
+                <a:latin typeface="Inter"/>
+              </a:rPr>
+              <a:t>  ● NUEVA</a:t>
             </a:r>
           </a:p>
         </p:txBody>
@@ -8473,8 +8329,8 @@
         </p:nvSpPr>
         <p:spPr>
           <a:xfrm>
-            <a:off x="7909560" y="3465576"/>
-            <a:ext cx="3566160" cy="457200"/>
+            <a:off x="6464808" y="2194560"/>
+            <a:ext cx="4992624" cy="502920"/>
           </a:xfrm>
           <a:prstGeom prst="rect">
             <a:avLst/>
@@ -8499,36 +8355,82 @@
               </a:spcAft>
             </a:pPr>
             <a:r>
-              <a:rPr sz="1200" b="0" i="0">
-                <a:solidFill>
-                  <a:srgbClr val="20242E"/>
-                </a:solidFill>
-                <a:latin typeface="Inter"/>
-              </a:rPr>
-              <a:t>🟢🟡🔴  </a:t>
-            </a:r>
-            <a:r>
-              <a:rPr sz="1200" b="0" i="0">
-                <a:solidFill>
-                  <a:srgbClr val="20242E"/>
-                </a:solidFill>
-                <a:latin typeface="Inter"/>
-              </a:rPr>
-              <a:t>iemand naar naam vragen</a:t>
-            </a:r>
-          </a:p>
-        </p:txBody>
-      </p:sp>
-      <p:sp>
-        <p:nvSpPr>
-          <p:cNvPr id="15" name="TextBox 14"/>
+              <a:rPr sz="900" b="0" i="0">
+                <a:solidFill>
+                  <a:srgbClr val="6A6E78"/>
+                </a:solidFill>
+                <a:latin typeface="Inter"/>
+              </a:rPr>
+              <a:t>Me llamo… · (Yo) soy… · Encantado/a</a:t>
+            </a:r>
+          </a:p>
+        </p:txBody>
+      </p:sp>
+      <p:sp>
+        <p:nvSpPr>
+          <p:cNvPr id="15" name="Rounded Rectangle 14"/>
+          <p:cNvSpPr/>
+          <p:nvPr/>
+        </p:nvSpPr>
+        <p:spPr>
+          <a:xfrm>
+            <a:off x="502920" y="2898648"/>
+            <a:ext cx="5394960" cy="1060704"/>
+          </a:xfrm>
+          <a:prstGeom prst="roundRect">
+            <a:avLst>
+              <a:gd name="adj" fmla="val 5500"/>
+            </a:avLst>
+          </a:prstGeom>
+          <a:solidFill>
+            <a:srgbClr val="FBEAEC"/>
+          </a:solidFill>
+          <a:ln w="15240">
+            <a:solidFill>
+              <a:srgbClr val="D64550"/>
+            </a:solidFill>
+          </a:ln>
+          <a:effectLst/>
+          <a:effectLst>
+            <a:outerShdw blurRad="90000" dist="38000" dir="5400000" rotWithShape="0">
+              <a:srgbClr val="20242E">
+                <a:alpha val="22000"/>
+              </a:srgbClr>
+            </a:outerShdw>
+          </a:effectLst>
+        </p:spPr>
+        <p:style>
+          <a:lnRef idx="1">
+            <a:schemeClr val="accent1"/>
+          </a:lnRef>
+          <a:fillRef idx="3">
+            <a:schemeClr val="accent1"/>
+          </a:fillRef>
+          <a:effectRef idx="2">
+            <a:schemeClr val="accent1"/>
+          </a:effectRef>
+          <a:fontRef idx="minor">
+            <a:schemeClr val="lt1"/>
+          </a:fontRef>
+        </p:style>
+        <p:txBody>
+          <a:bodyPr rtlCol="0" anchor="ctr"/>
+          <a:lstStyle/>
+          <a:p>
+            <a:pPr algn="ctr"/>
+          </a:p>
+        </p:txBody>
+      </p:sp>
+      <p:sp>
+        <p:nvSpPr>
+          <p:cNvPr id="16" name="TextBox 15"/>
           <p:cNvSpPr txBox="1"/>
           <p:nvPr/>
         </p:nvSpPr>
         <p:spPr>
           <a:xfrm>
-            <a:off x="7909560" y="4032504"/>
-            <a:ext cx="3566160" cy="457200"/>
+            <a:off x="704088" y="3008376"/>
+            <a:ext cx="4992624" cy="365760"/>
           </a:xfrm>
           <a:prstGeom prst="rect">
             <a:avLst/>
@@ -8553,36 +8455,36 @@
               </a:spcAft>
             </a:pPr>
             <a:r>
-              <a:rPr sz="1200" b="0" i="0">
+              <a:rPr sz="1250" b="1" i="0">
                 <a:solidFill>
                   <a:srgbClr val="20242E"/>
                 </a:solidFill>
-                <a:latin typeface="Inter"/>
-              </a:rPr>
-              <a:t>🟢🟡🔴  </a:t>
-            </a:r>
-            <a:r>
-              <a:rPr sz="1200" b="0" i="0">
-                <a:solidFill>
-                  <a:srgbClr val="20242E"/>
-                </a:solidFill>
-                <a:latin typeface="Inter"/>
-              </a:rPr>
-              <a:t>-o/-a &amp; tú/usted kiezen</a:t>
-            </a:r>
-          </a:p>
-        </p:txBody>
-      </p:sp>
-      <p:sp>
-        <p:nvSpPr>
-          <p:cNvPr id="16" name="TextBox 15"/>
+                <a:latin typeface="Bricolage Grotesque"/>
+              </a:rPr>
+              <a:t>Pedir y dar información personal</a:t>
+            </a:r>
+            <a:r>
+              <a:rPr sz="900" b="1" i="0">
+                <a:solidFill>
+                  <a:srgbClr val="A8323B"/>
+                </a:solidFill>
+                <a:latin typeface="Inter"/>
+              </a:rPr>
+              <a:t>  ● NUEVA</a:t>
+            </a:r>
+          </a:p>
+        </p:txBody>
+      </p:sp>
+      <p:sp>
+        <p:nvSpPr>
+          <p:cNvPr id="17" name="TextBox 16"/>
           <p:cNvSpPr txBox="1"/>
           <p:nvPr/>
         </p:nvSpPr>
         <p:spPr>
           <a:xfrm>
-            <a:off x="7909560" y="4892040"/>
-            <a:ext cx="3566160" cy="640080"/>
+            <a:off x="704088" y="3401568"/>
+            <a:ext cx="4992624" cy="502920"/>
           </a:xfrm>
           <a:prstGeom prst="rect">
             <a:avLst/>
@@ -8607,15 +8509,147 @@
               </a:spcAft>
             </a:pPr>
             <a:r>
-              <a:rPr sz="1200" b="1" i="0">
+              <a:rPr sz="900" b="0" i="0">
+                <a:solidFill>
+                  <a:srgbClr val="6A6E78"/>
+                </a:solidFill>
+                <a:latin typeface="Inter"/>
+              </a:rPr>
+              <a:t>¿Cómo te llamas? · ¿Y tú?</a:t>
+            </a:r>
+          </a:p>
+        </p:txBody>
+      </p:sp>
+      <p:sp>
+        <p:nvSpPr>
+          <p:cNvPr id="18" name="Rounded Rectangle 17"/>
+          <p:cNvSpPr/>
+          <p:nvPr/>
+        </p:nvSpPr>
+        <p:spPr>
+          <a:xfrm>
+            <a:off x="6263640" y="2898648"/>
+            <a:ext cx="5394960" cy="1060704"/>
+          </a:xfrm>
+          <a:prstGeom prst="roundRect">
+            <a:avLst>
+              <a:gd name="adj" fmla="val 5500"/>
+            </a:avLst>
+          </a:prstGeom>
+          <a:solidFill>
+            <a:srgbClr val="FBEAEC"/>
+          </a:solidFill>
+          <a:ln w="15240">
+            <a:solidFill>
+              <a:srgbClr val="D64550"/>
+            </a:solidFill>
+          </a:ln>
+          <a:effectLst/>
+          <a:effectLst>
+            <a:outerShdw blurRad="90000" dist="38000" dir="5400000" rotWithShape="0">
+              <a:srgbClr val="20242E">
+                <a:alpha val="22000"/>
+              </a:srgbClr>
+            </a:outerShdw>
+          </a:effectLst>
+        </p:spPr>
+        <p:style>
+          <a:lnRef idx="1">
+            <a:schemeClr val="accent1"/>
+          </a:lnRef>
+          <a:fillRef idx="3">
+            <a:schemeClr val="accent1"/>
+          </a:fillRef>
+          <a:effectRef idx="2">
+            <a:schemeClr val="accent1"/>
+          </a:effectRef>
+          <a:fontRef idx="minor">
+            <a:schemeClr val="lt1"/>
+          </a:fontRef>
+        </p:style>
+        <p:txBody>
+          <a:bodyPr rtlCol="0" anchor="ctr"/>
+          <a:lstStyle/>
+          <a:p>
+            <a:pPr algn="ctr"/>
+          </a:p>
+        </p:txBody>
+      </p:sp>
+      <p:sp>
+        <p:nvSpPr>
+          <p:cNvPr id="19" name="TextBox 18"/>
+          <p:cNvSpPr txBox="1"/>
+          <p:nvPr/>
+        </p:nvSpPr>
+        <p:spPr>
+          <a:xfrm>
+            <a:off x="6464808" y="3008376"/>
+            <a:ext cx="4992624" cy="365760"/>
+          </a:xfrm>
+          <a:prstGeom prst="rect">
+            <a:avLst/>
+          </a:prstGeom>
+          <a:noFill/>
+        </p:spPr>
+        <p:txBody>
+          <a:bodyPr wrap="square" anchor="t" lIns="38100" rIns="38100" tIns="25400" bIns="25400">
+            <a:spAutoFit/>
+          </a:bodyPr>
+          <a:lstStyle/>
+          <a:p>
+            <a:pPr algn="l">
+              <a:lnSpc>
+                <a:spcPct val="106000"/>
+              </a:lnSpc>
+              <a:spcBef>
+                <a:spcPts val="0"/>
+              </a:spcBef>
+              <a:spcAft>
+                <a:spcPts val="200"/>
+              </a:spcAft>
+            </a:pPr>
+            <a:r>
+              <a:rPr sz="1250" b="1" i="0">
+                <a:solidFill>
+                  <a:srgbClr val="20242E"/>
+                </a:solidFill>
+                <a:latin typeface="Bricolage Grotesque"/>
+              </a:rPr>
+              <a:t>Gestionar la comprensión</a:t>
+            </a:r>
+            <a:r>
+              <a:rPr sz="900" b="1" i="0">
                 <a:solidFill>
                   <a:srgbClr val="A8323B"/>
                 </a:solidFill>
-                <a:latin typeface="Bricolage Grotesque"/>
-              </a:rPr>
-              <a:t>🎮 Repasa jugando</a:t>
-            </a:r>
-          </a:p>
+                <a:latin typeface="Inter"/>
+              </a:rPr>
+              <a:t>  ● NUEVA</a:t>
+            </a:r>
+          </a:p>
+        </p:txBody>
+      </p:sp>
+      <p:sp>
+        <p:nvSpPr>
+          <p:cNvPr id="20" name="TextBox 19"/>
+          <p:cNvSpPr txBox="1"/>
+          <p:nvPr/>
+        </p:nvSpPr>
+        <p:spPr>
+          <a:xfrm>
+            <a:off x="6464808" y="3401568"/>
+            <a:ext cx="4992624" cy="502920"/>
+          </a:xfrm>
+          <a:prstGeom prst="rect">
+            <a:avLst/>
+          </a:prstGeom>
+          <a:noFill/>
+        </p:spPr>
+        <p:txBody>
+          <a:bodyPr wrap="square" anchor="t" lIns="38100" rIns="38100" tIns="25400" bIns="25400">
+            <a:spAutoFit/>
+          </a:bodyPr>
+          <a:lstStyle/>
           <a:p>
             <a:pPr algn="l">
               <a:lnSpc>
@@ -8629,20 +8663,20 @@
               </a:spcAft>
             </a:pPr>
             <a:r>
-              <a:rPr sz="1100" b="0" i="1">
+              <a:rPr sz="900" b="0" i="0">
                 <a:solidFill>
                   <a:srgbClr val="6A6E78"/>
                 </a:solidFill>
                 <a:latin typeface="Inter"/>
               </a:rPr>
-              <a:t>online op de hub</a:t>
-            </a:r>
-          </a:p>
-        </p:txBody>
-      </p:sp>
-      <p:sp>
-        <p:nvSpPr>
-          <p:cNvPr id="17" name="Rectangle 16"/>
+              <a:t>¿Cómo? · Otra vez, por favor</a:t>
+            </a:r>
+          </a:p>
+        </p:txBody>
+      </p:sp>
+      <p:sp>
+        <p:nvSpPr>
+          <p:cNvPr id="21" name="Rectangle 20"/>
           <p:cNvSpPr/>
           <p:nvPr/>
         </p:nvSpPr>
@@ -8686,7 +8720,7 @@
       </p:sp>
       <p:sp>
         <p:nvSpPr>
-          <p:cNvPr id="18" name="TextBox 17"/>
+          <p:cNvPr id="22" name="TextBox 21"/>
           <p:cNvSpPr txBox="1"/>
           <p:nvPr/>
         </p:nvSpPr>
@@ -8740,7 +8774,7 @@
       </p:sp>
       <p:sp>
         <p:nvSpPr>
-          <p:cNvPr id="19" name="TextBox 18"/>
+          <p:cNvPr id="23" name="TextBox 22"/>
           <p:cNvSpPr txBox="1"/>
           <p:nvPr/>
         </p:nvSpPr>
@@ -8785,7 +8819,7 @@
       </p:sp>
       <p:sp>
         <p:nvSpPr>
-          <p:cNvPr id="20" name="TextBox 19"/>
+          <p:cNvPr id="24" name="TextBox 23"/>
           <p:cNvSpPr txBox="1"/>
           <p:nvPr/>
         </p:nvSpPr>
@@ -8861,7 +8895,7 @@
             <a:avLst/>
           </a:prstGeom>
           <a:solidFill>
-            <a:srgbClr val="241C1B"/>
+            <a:srgbClr val="FCFBF8"/>
           </a:solidFill>
           <a:ln>
             <a:noFill/>
@@ -8892,14 +8926,202 @@
       </p:sp>
       <p:sp>
         <p:nvSpPr>
-          <p:cNvPr id="3" name="TextBox 2"/>
+          <p:cNvPr id="3" name="Rectangle 2"/>
+          <p:cNvSpPr/>
+          <p:nvPr/>
+        </p:nvSpPr>
+        <p:spPr>
+          <a:xfrm>
+            <a:off x="0" y="0"/>
+            <a:ext cx="12191695" cy="1078992"/>
+          </a:xfrm>
+          <a:prstGeom prst="rect">
+            <a:avLst/>
+          </a:prstGeom>
+          <a:solidFill>
+            <a:srgbClr val="D64550"/>
+          </a:solidFill>
+          <a:ln>
+            <a:noFill/>
+          </a:ln>
+          <a:effectLst/>
+        </p:spPr>
+        <p:style>
+          <a:lnRef idx="1">
+            <a:schemeClr val="accent1"/>
+          </a:lnRef>
+          <a:fillRef idx="3">
+            <a:schemeClr val="accent1"/>
+          </a:fillRef>
+          <a:effectRef idx="2">
+            <a:schemeClr val="accent1"/>
+          </a:effectRef>
+          <a:fontRef idx="minor">
+            <a:schemeClr val="lt1"/>
+          </a:fontRef>
+        </p:style>
+        <p:txBody>
+          <a:bodyPr rtlCol="0" anchor="ctr"/>
+          <a:lstStyle/>
+          <a:p>
+            <a:pPr algn="ctr"/>
+          </a:p>
+        </p:txBody>
+      </p:sp>
+      <p:sp>
+        <p:nvSpPr>
+          <p:cNvPr id="4" name="Rectangle 3"/>
+          <p:cNvSpPr/>
+          <p:nvPr/>
+        </p:nvSpPr>
+        <p:spPr>
+          <a:xfrm>
+            <a:off x="0" y="1078992"/>
+            <a:ext cx="12191695" cy="54864"/>
+          </a:xfrm>
+          <a:prstGeom prst="rect">
+            <a:avLst/>
+          </a:prstGeom>
+          <a:solidFill>
+            <a:srgbClr val="A8323B"/>
+          </a:solidFill>
+          <a:ln>
+            <a:noFill/>
+          </a:ln>
+          <a:effectLst/>
+        </p:spPr>
+        <p:style>
+          <a:lnRef idx="1">
+            <a:schemeClr val="accent1"/>
+          </a:lnRef>
+          <a:fillRef idx="3">
+            <a:schemeClr val="accent1"/>
+          </a:fillRef>
+          <a:effectRef idx="2">
+            <a:schemeClr val="accent1"/>
+          </a:effectRef>
+          <a:fontRef idx="minor">
+            <a:schemeClr val="lt1"/>
+          </a:fontRef>
+        </p:style>
+        <p:txBody>
+          <a:bodyPr rtlCol="0" anchor="ctr"/>
+          <a:lstStyle/>
+          <a:p>
+            <a:pPr algn="ctr"/>
+          </a:p>
+        </p:txBody>
+      </p:sp>
+      <p:sp>
+        <p:nvSpPr>
+          <p:cNvPr id="5" name="Rounded Rectangle 4"/>
+          <p:cNvSpPr/>
+          <p:nvPr/>
+        </p:nvSpPr>
+        <p:spPr>
+          <a:xfrm>
+            <a:off x="502920" y="182880"/>
+            <a:ext cx="623620" cy="292608"/>
+          </a:xfrm>
+          <a:prstGeom prst="roundRect">
+            <a:avLst>
+              <a:gd name="adj" fmla="val 50000"/>
+            </a:avLst>
+          </a:prstGeom>
+          <a:solidFill>
+            <a:srgbClr val="FFFFFF"/>
+          </a:solidFill>
+          <a:ln>
+            <a:noFill/>
+          </a:ln>
+          <a:effectLst/>
+        </p:spPr>
+        <p:style>
+          <a:lnRef idx="1">
+            <a:schemeClr val="accent1"/>
+          </a:lnRef>
+          <a:fillRef idx="3">
+            <a:schemeClr val="accent1"/>
+          </a:fillRef>
+          <a:effectRef idx="2">
+            <a:schemeClr val="accent1"/>
+          </a:effectRef>
+          <a:fontRef idx="minor">
+            <a:schemeClr val="lt1"/>
+          </a:fontRef>
+        </p:style>
+        <p:txBody>
+          <a:bodyPr rtlCol="0" anchor="ctr" wrap="none" lIns="88900" rIns="88900" tIns="12700" bIns="12700"/>
+          <a:lstStyle/>
+          <a:p>
+            <a:pPr algn="ctr"/>
+            <a:r>
+              <a:rPr sz="1100" b="1">
+                <a:solidFill>
+                  <a:srgbClr val="D64550"/>
+                </a:solidFill>
+                <a:latin typeface="Inter"/>
+              </a:rPr>
+              <a:t>REPASO</a:t>
+            </a:r>
+          </a:p>
+        </p:txBody>
+      </p:sp>
+      <p:sp>
+        <p:nvSpPr>
+          <p:cNvPr id="6" name="TextBox 5"/>
           <p:cNvSpPr txBox="1"/>
           <p:nvPr/>
         </p:nvSpPr>
         <p:spPr>
           <a:xfrm>
-            <a:off x="548640" y="457200"/>
-            <a:ext cx="10972800" cy="640080"/>
+            <a:off x="457200" y="457200"/>
+            <a:ext cx="9692640" cy="502920"/>
+          </a:xfrm>
+          <a:prstGeom prst="rect">
+            <a:avLst/>
+          </a:prstGeom>
+          <a:noFill/>
+        </p:spPr>
+        <p:txBody>
+          <a:bodyPr wrap="square" anchor="ctr" lIns="38100" rIns="38100" tIns="25400" bIns="25400">
+            <a:spAutoFit/>
+          </a:bodyPr>
+          <a:lstStyle/>
+          <a:p>
+            <a:pPr algn="l">
+              <a:lnSpc>
+                <a:spcPct val="106000"/>
+              </a:lnSpc>
+              <a:spcBef>
+                <a:spcPts val="0"/>
+              </a:spcBef>
+              <a:spcAft>
+                <a:spcPts val="200"/>
+              </a:spcAft>
+            </a:pPr>
+            <a:r>
+              <a:rPr sz="2700" b="1" i="0">
+                <a:solidFill>
+                  <a:srgbClr val="FFFFFF"/>
+                </a:solidFill>
+                <a:latin typeface="Bricolage Grotesque"/>
+              </a:rPr>
+              <a:t>Lo esencial de un vistazo</a:t>
+            </a:r>
+          </a:p>
+        </p:txBody>
+      </p:sp>
+      <p:sp>
+        <p:nvSpPr>
+          <p:cNvPr id="7" name="TextBox 6"/>
+          <p:cNvSpPr txBox="1"/>
+          <p:nvPr/>
+        </p:nvSpPr>
+        <p:spPr>
+          <a:xfrm>
+            <a:off x="502920" y="932688"/>
+            <a:ext cx="9692640" cy="274320"/>
           </a:xfrm>
           <a:prstGeom prst="rect">
             <a:avLst/>
@@ -8924,27 +9146,82 @@
               </a:spcAft>
             </a:pPr>
             <a:r>
-              <a:rPr sz="2200" b="1" i="0">
-                <a:solidFill>
-                  <a:srgbClr val="FFFFFF"/>
-                </a:solidFill>
-                <a:latin typeface="Bricolage Grotesque"/>
-              </a:rPr>
-              <a:t>Docentendossier · Unidad 1 «Presentaciones»</a:t>
-            </a:r>
-          </a:p>
-        </p:txBody>
-      </p:sp>
-      <p:sp>
-        <p:nvSpPr>
-          <p:cNvPr id="4" name="TextBox 3"/>
+              <a:rPr sz="1250" b="0" i="1">
+                <a:solidFill>
+                  <a:srgbClr val="FBEAEC"/>
+                </a:solidFill>
+                <a:latin typeface="Inter"/>
+              </a:rPr>
+              <a:t>Wat je nu kunt — semáforo</a:t>
+            </a:r>
+          </a:p>
+        </p:txBody>
+      </p:sp>
+      <p:sp>
+        <p:nvSpPr>
+          <p:cNvPr id="8" name="Rounded Rectangle 7"/>
+          <p:cNvSpPr/>
+          <p:nvPr/>
+        </p:nvSpPr>
+        <p:spPr>
+          <a:xfrm>
+            <a:off x="502920" y="1554480"/>
+            <a:ext cx="6949440" cy="4023360"/>
+          </a:xfrm>
+          <a:prstGeom prst="roundRect">
+            <a:avLst>
+              <a:gd name="adj" fmla="val 5500"/>
+            </a:avLst>
+          </a:prstGeom>
+          <a:solidFill>
+            <a:srgbClr val="FFFFFF"/>
+          </a:solidFill>
+          <a:ln w="15240">
+            <a:solidFill>
+              <a:srgbClr val="E4E3DE"/>
+            </a:solidFill>
+          </a:ln>
+          <a:effectLst/>
+          <a:effectLst>
+            <a:outerShdw blurRad="90000" dist="38000" dir="5400000" rotWithShape="0">
+              <a:srgbClr val="20242E">
+                <a:alpha val="22000"/>
+              </a:srgbClr>
+            </a:outerShdw>
+          </a:effectLst>
+        </p:spPr>
+        <p:style>
+          <a:lnRef idx="1">
+            <a:schemeClr val="accent1"/>
+          </a:lnRef>
+          <a:fillRef idx="3">
+            <a:schemeClr val="accent1"/>
+          </a:fillRef>
+          <a:effectRef idx="2">
+            <a:schemeClr val="accent1"/>
+          </a:effectRef>
+          <a:fontRef idx="minor">
+            <a:schemeClr val="lt1"/>
+          </a:fontRef>
+        </p:style>
+        <p:txBody>
+          <a:bodyPr rtlCol="0" anchor="ctr"/>
+          <a:lstStyle/>
+          <a:p>
+            <a:pPr algn="ctr"/>
+          </a:p>
+        </p:txBody>
+      </p:sp>
+      <p:sp>
+        <p:nvSpPr>
+          <p:cNvPr id="9" name="TextBox 8"/>
           <p:cNvSpPr txBox="1"/>
           <p:nvPr/>
         </p:nvSpPr>
         <p:spPr>
           <a:xfrm>
-            <a:off x="548640" y="1280160"/>
-            <a:ext cx="11064240" cy="4937760"/>
+            <a:off x="777240" y="1737360"/>
+            <a:ext cx="6492240" cy="3657600"/>
           </a:xfrm>
           <a:prstGeom prst="rect">
             <a:avLst/>
@@ -8971,11 +9248,11 @@
             <a:r>
               <a:rPr sz="1400" b="1" i="0">
                 <a:solidFill>
-                  <a:srgbClr val="FBEAEC"/>
+                  <a:srgbClr val="A8323B"/>
                 </a:solidFill>
                 <a:latin typeface="Bricolage Grotesque"/>
               </a:rPr>
-              <a:t>Timing (2 lesuren van 50 min).</a:t>
+              <a:t>Zo groet &amp; stel je je voor</a:t>
             </a:r>
           </a:p>
           <a:p>
@@ -8991,13 +9268,13 @@
               </a:spcAft>
             </a:pPr>
             <a:r>
-              <a:rPr sz="1250" b="0" i="0">
-                <a:solidFill>
-                  <a:srgbClr val="ECEAE3"/>
-                </a:solidFill>
-                <a:latin typeface="Inter"/>
-              </a:rPr>
-              <a:t>Les 1: Escucha + Kit (saludos/presentarse) + eerste práctica. Les 2: gramática functioneel, hablar, tarea + música.</a:t>
+              <a:rPr sz="1400" b="0" i="0">
+                <a:solidFill>
+                  <a:srgbClr val="20242E"/>
+                </a:solidFill>
+                <a:latin typeface="Inter"/>
+              </a:rPr>
+              <a:t>¡Hola! Me llamo ___. Soy de ___. Encantad_.</a:t>
             </a:r>
           </a:p>
           <a:p>
@@ -9013,6 +9290,28 @@
               </a:spcAft>
             </a:pPr>
             <a:r>
+              <a:rPr sz="1400" b="0" i="0">
+                <a:solidFill>
+                  <a:srgbClr val="20242E"/>
+                </a:solidFill>
+                <a:latin typeface="Inter"/>
+              </a:rPr>
+              <a:t>¿Y tú, cómo te llamas?</a:t>
+            </a:r>
+          </a:p>
+          <a:p>
+            <a:pPr algn="l">
+              <a:lnSpc>
+                <a:spcPct val="106000"/>
+              </a:lnSpc>
+              <a:spcBef>
+                <a:spcPts val="0"/>
+              </a:spcBef>
+              <a:spcAft>
+                <a:spcPts val="200"/>
+              </a:spcAft>
+            </a:pPr>
+            <a:r>
               <a:rPr sz="600" b="0" i="0">
                 <a:solidFill>
                   <a:srgbClr val="20242E"/>
@@ -9037,11 +9336,11 @@
             <a:r>
               <a:rPr sz="1400" b="1" i="0">
                 <a:solidFill>
-                  <a:srgbClr val="FBEAEC"/>
+                  <a:srgbClr val="A8323B"/>
                 </a:solidFill>
                 <a:latin typeface="Bricolage Grotesque"/>
               </a:rPr>
-              <a:t>Aanpak C4 (survival).</a:t>
+              <a:t>Onthou</a:t>
             </a:r>
           </a:p>
           <a:p>
@@ -9057,13 +9356,13 @@
               </a:spcAft>
             </a:pPr>
             <a:r>
-              <a:rPr sz="1250" b="0" i="0">
-                <a:solidFill>
-                  <a:srgbClr val="ECEAE3"/>
-                </a:solidFill>
-                <a:latin typeface="Inter"/>
-              </a:rPr>
-              <a:t>Chunks komen auditief binnen (luisteren → naspreken). Grammatica enkel functioneel, geen volledige conjugatie — dat is voor het 5de. Zo krijgen de 4MOT-leerlingen voorsprong in de mechaniek zonder de leerplanstof van C5 op te gebruiken.</a:t>
+              <a:rPr sz="1300" b="0" i="0">
+                <a:solidFill>
+                  <a:srgbClr val="20242E"/>
+                </a:solidFill>
+                <a:latin typeface="Inter"/>
+              </a:rPr>
+              <a:t>ser: soy · eres · es</a:t>
             </a:r>
           </a:p>
           <a:p>
@@ -9079,13 +9378,13 @@
               </a:spcAft>
             </a:pPr>
             <a:r>
-              <a:rPr sz="600" b="0" i="0">
+              <a:rPr sz="1300" b="0" i="0">
                 <a:solidFill>
                   <a:srgbClr val="20242E"/>
                 </a:solidFill>
                 <a:latin typeface="Inter"/>
               </a:rPr>
-              <a:t/>
+              <a:t>llamarse: me/te/se + llamo/llamas/llama</a:t>
             </a:r>
           </a:p>
           <a:p>
@@ -9101,15 +9400,138 @@
               </a:spcAft>
             </a:pPr>
             <a:r>
-              <a:rPr sz="1400" b="1" i="0">
-                <a:solidFill>
-                  <a:srgbClr val="FBEAEC"/>
+              <a:rPr sz="1300" b="0" i="0">
+                <a:solidFill>
+                  <a:srgbClr val="20242E"/>
+                </a:solidFill>
+                <a:latin typeface="Inter"/>
+              </a:rPr>
+              <a:t>-o = ♂ · -a = ♀   |   tú = vriend · usted = beleefd</a:t>
+            </a:r>
+          </a:p>
+        </p:txBody>
+      </p:sp>
+      <p:sp>
+        <p:nvSpPr>
+          <p:cNvPr id="10" name="Rounded Rectangle 9"/>
+          <p:cNvSpPr/>
+          <p:nvPr/>
+        </p:nvSpPr>
+        <p:spPr>
+          <a:xfrm>
+            <a:off x="7680960" y="1554480"/>
+            <a:ext cx="4023360" cy="4023360"/>
+          </a:xfrm>
+          <a:prstGeom prst="roundRect">
+            <a:avLst>
+              <a:gd name="adj" fmla="val 5500"/>
+            </a:avLst>
+          </a:prstGeom>
+          <a:solidFill>
+            <a:srgbClr val="FBEAEC"/>
+          </a:solidFill>
+          <a:ln w="15240">
+            <a:solidFill>
+              <a:srgbClr val="D64550"/>
+            </a:solidFill>
+          </a:ln>
+          <a:effectLst/>
+          <a:effectLst>
+            <a:outerShdw blurRad="90000" dist="38000" dir="5400000" rotWithShape="0">
+              <a:srgbClr val="20242E">
+                <a:alpha val="22000"/>
+              </a:srgbClr>
+            </a:outerShdw>
+          </a:effectLst>
+        </p:spPr>
+        <p:style>
+          <a:lnRef idx="1">
+            <a:schemeClr val="accent1"/>
+          </a:lnRef>
+          <a:fillRef idx="3">
+            <a:schemeClr val="accent1"/>
+          </a:fillRef>
+          <a:effectRef idx="2">
+            <a:schemeClr val="accent1"/>
+          </a:effectRef>
+          <a:fontRef idx="minor">
+            <a:schemeClr val="lt1"/>
+          </a:fontRef>
+        </p:style>
+        <p:txBody>
+          <a:bodyPr rtlCol="0" anchor="ctr"/>
+          <a:lstStyle/>
+          <a:p>
+            <a:pPr algn="ctr"/>
+          </a:p>
+        </p:txBody>
+      </p:sp>
+      <p:sp>
+        <p:nvSpPr>
+          <p:cNvPr id="11" name="TextBox 10"/>
+          <p:cNvSpPr txBox="1"/>
+          <p:nvPr/>
+        </p:nvSpPr>
+        <p:spPr>
+          <a:xfrm>
+            <a:off x="7909560" y="1737360"/>
+            <a:ext cx="3566160" cy="457200"/>
+          </a:xfrm>
+          <a:prstGeom prst="rect">
+            <a:avLst/>
+          </a:prstGeom>
+          <a:noFill/>
+        </p:spPr>
+        <p:txBody>
+          <a:bodyPr wrap="square" anchor="t" lIns="38100" rIns="38100" tIns="25400" bIns="25400">
+            <a:spAutoFit/>
+          </a:bodyPr>
+          <a:lstStyle/>
+          <a:p>
+            <a:pPr algn="l">
+              <a:lnSpc>
+                <a:spcPct val="106000"/>
+              </a:lnSpc>
+              <a:spcBef>
+                <a:spcPts val="0"/>
+              </a:spcBef>
+              <a:spcAft>
+                <a:spcPts val="200"/>
+              </a:spcAft>
+            </a:pPr>
+            <a:r>
+              <a:rPr sz="1300" b="1" i="0">
+                <a:solidFill>
+                  <a:srgbClr val="A8323B"/>
                 </a:solidFill>
                 <a:latin typeface="Bricolage Grotesque"/>
               </a:rPr>
-              <a:t>Evaluatie.</a:t>
-            </a:r>
-          </a:p>
+              <a:t>Puedo… · Ik kan…</a:t>
+            </a:r>
+          </a:p>
+        </p:txBody>
+      </p:sp>
+      <p:sp>
+        <p:nvSpPr>
+          <p:cNvPr id="12" name="TextBox 11"/>
+          <p:cNvSpPr txBox="1"/>
+          <p:nvPr/>
+        </p:nvSpPr>
+        <p:spPr>
+          <a:xfrm>
+            <a:off x="7909560" y="2331720"/>
+            <a:ext cx="3566160" cy="457200"/>
+          </a:xfrm>
+          <a:prstGeom prst="rect">
+            <a:avLst/>
+          </a:prstGeom>
+          <a:noFill/>
+        </p:spPr>
+        <p:txBody>
+          <a:bodyPr wrap="square" anchor="t" lIns="38100" rIns="38100" tIns="25400" bIns="25400">
+            <a:spAutoFit/>
+          </a:bodyPr>
+          <a:lstStyle/>
           <a:p>
             <a:pPr algn="l">
               <a:lnSpc>
@@ -9123,15 +9545,47 @@
               </a:spcAft>
             </a:pPr>
             <a:r>
-              <a:rPr sz="1250" b="0" i="0">
-                <a:solidFill>
-                  <a:srgbClr val="ECEAE3"/>
-                </a:solidFill>
-                <a:latin typeface="Inter"/>
-              </a:rPr>
-              <a:t>Mondelinge mini-taak (preséntate + 3 klasgenoten) + herkennen van saludos/chunks. Geen leerplan → focus op «kunnen gebruiken in de praktijk».</a:t>
-            </a:r>
-          </a:p>
+              <a:rPr sz="1200" b="0" i="0">
+                <a:solidFill>
+                  <a:srgbClr val="20242E"/>
+                </a:solidFill>
+                <a:latin typeface="Inter"/>
+              </a:rPr>
+              <a:t>🟢🟡🔴  </a:t>
+            </a:r>
+            <a:r>
+              <a:rPr sz="1200" b="0" i="0">
+                <a:solidFill>
+                  <a:srgbClr val="20242E"/>
+                </a:solidFill>
+                <a:latin typeface="Inter"/>
+              </a:rPr>
+              <a:t>groeten &amp; afscheid nemen</a:t>
+            </a:r>
+          </a:p>
+        </p:txBody>
+      </p:sp>
+      <p:sp>
+        <p:nvSpPr>
+          <p:cNvPr id="13" name="TextBox 12"/>
+          <p:cNvSpPr txBox="1"/>
+          <p:nvPr/>
+        </p:nvSpPr>
+        <p:spPr>
+          <a:xfrm>
+            <a:off x="7909560" y="2898648"/>
+            <a:ext cx="3566160" cy="457200"/>
+          </a:xfrm>
+          <a:prstGeom prst="rect">
+            <a:avLst/>
+          </a:prstGeom>
+          <a:noFill/>
+        </p:spPr>
+        <p:txBody>
+          <a:bodyPr wrap="square" anchor="t" lIns="38100" rIns="38100" tIns="25400" bIns="25400">
+            <a:spAutoFit/>
+          </a:bodyPr>
+          <a:lstStyle/>
           <a:p>
             <a:pPr algn="l">
               <a:lnSpc>
@@ -9145,15 +9599,47 @@
               </a:spcAft>
             </a:pPr>
             <a:r>
-              <a:rPr sz="600" b="0" i="0">
+              <a:rPr sz="1200" b="0" i="0">
                 <a:solidFill>
                   <a:srgbClr val="20242E"/>
                 </a:solidFill>
                 <a:latin typeface="Inter"/>
               </a:rPr>
-              <a:t/>
-            </a:r>
-          </a:p>
+              <a:t>🟢🟡🔴  </a:t>
+            </a:r>
+            <a:r>
+              <a:rPr sz="1200" b="0" i="0">
+                <a:solidFill>
+                  <a:srgbClr val="20242E"/>
+                </a:solidFill>
+                <a:latin typeface="Inter"/>
+              </a:rPr>
+              <a:t>mezelf voorstellen</a:t>
+            </a:r>
+          </a:p>
+        </p:txBody>
+      </p:sp>
+      <p:sp>
+        <p:nvSpPr>
+          <p:cNvPr id="14" name="TextBox 13"/>
+          <p:cNvSpPr txBox="1"/>
+          <p:nvPr/>
+        </p:nvSpPr>
+        <p:spPr>
+          <a:xfrm>
+            <a:off x="7909560" y="3465576"/>
+            <a:ext cx="3566160" cy="457200"/>
+          </a:xfrm>
+          <a:prstGeom prst="rect">
+            <a:avLst/>
+          </a:prstGeom>
+          <a:noFill/>
+        </p:spPr>
+        <p:txBody>
+          <a:bodyPr wrap="square" anchor="t" lIns="38100" rIns="38100" tIns="25400" bIns="25400">
+            <a:spAutoFit/>
+          </a:bodyPr>
+          <a:lstStyle/>
           <a:p>
             <a:pPr algn="l">
               <a:lnSpc>
@@ -9167,20 +9653,150 @@
               </a:spcAft>
             </a:pPr>
             <a:r>
-              <a:rPr sz="1150" b="0" i="1">
-                <a:solidFill>
-                  <a:srgbClr val="A6A29A"/>
-                </a:solidFill>
-                <a:latin typeface="Inter"/>
-              </a:rPr>
-              <a:t>Oplossingen staan bij elke oefendia in de presenter-notities; antwoorden verschijnen bij klik.</a:t>
-            </a:r>
-          </a:p>
-        </p:txBody>
-      </p:sp>
-      <p:sp>
-        <p:nvSpPr>
-          <p:cNvPr id="5" name="Rectangle 4"/>
+              <a:rPr sz="1200" b="0" i="0">
+                <a:solidFill>
+                  <a:srgbClr val="20242E"/>
+                </a:solidFill>
+                <a:latin typeface="Inter"/>
+              </a:rPr>
+              <a:t>🟢🟡🔴  </a:t>
+            </a:r>
+            <a:r>
+              <a:rPr sz="1200" b="0" i="0">
+                <a:solidFill>
+                  <a:srgbClr val="20242E"/>
+                </a:solidFill>
+                <a:latin typeface="Inter"/>
+              </a:rPr>
+              <a:t>iemand naar naam vragen</a:t>
+            </a:r>
+          </a:p>
+        </p:txBody>
+      </p:sp>
+      <p:sp>
+        <p:nvSpPr>
+          <p:cNvPr id="15" name="TextBox 14"/>
+          <p:cNvSpPr txBox="1"/>
+          <p:nvPr/>
+        </p:nvSpPr>
+        <p:spPr>
+          <a:xfrm>
+            <a:off x="7909560" y="4032504"/>
+            <a:ext cx="3566160" cy="457200"/>
+          </a:xfrm>
+          <a:prstGeom prst="rect">
+            <a:avLst/>
+          </a:prstGeom>
+          <a:noFill/>
+        </p:spPr>
+        <p:txBody>
+          <a:bodyPr wrap="square" anchor="t" lIns="38100" rIns="38100" tIns="25400" bIns="25400">
+            <a:spAutoFit/>
+          </a:bodyPr>
+          <a:lstStyle/>
+          <a:p>
+            <a:pPr algn="l">
+              <a:lnSpc>
+                <a:spcPct val="106000"/>
+              </a:lnSpc>
+              <a:spcBef>
+                <a:spcPts val="0"/>
+              </a:spcBef>
+              <a:spcAft>
+                <a:spcPts val="200"/>
+              </a:spcAft>
+            </a:pPr>
+            <a:r>
+              <a:rPr sz="1200" b="0" i="0">
+                <a:solidFill>
+                  <a:srgbClr val="20242E"/>
+                </a:solidFill>
+                <a:latin typeface="Inter"/>
+              </a:rPr>
+              <a:t>🟢🟡🔴  </a:t>
+            </a:r>
+            <a:r>
+              <a:rPr sz="1200" b="0" i="0">
+                <a:solidFill>
+                  <a:srgbClr val="20242E"/>
+                </a:solidFill>
+                <a:latin typeface="Inter"/>
+              </a:rPr>
+              <a:t>-o/-a &amp; tú/usted kiezen</a:t>
+            </a:r>
+          </a:p>
+        </p:txBody>
+      </p:sp>
+      <p:sp>
+        <p:nvSpPr>
+          <p:cNvPr id="16" name="TextBox 15"/>
+          <p:cNvSpPr txBox="1"/>
+          <p:nvPr/>
+        </p:nvSpPr>
+        <p:spPr>
+          <a:xfrm>
+            <a:off x="7909560" y="4892040"/>
+            <a:ext cx="3566160" cy="640080"/>
+          </a:xfrm>
+          <a:prstGeom prst="rect">
+            <a:avLst/>
+          </a:prstGeom>
+          <a:noFill/>
+        </p:spPr>
+        <p:txBody>
+          <a:bodyPr wrap="square" anchor="t" lIns="38100" rIns="38100" tIns="25400" bIns="25400">
+            <a:spAutoFit/>
+          </a:bodyPr>
+          <a:lstStyle/>
+          <a:p>
+            <a:pPr algn="l">
+              <a:lnSpc>
+                <a:spcPct val="106000"/>
+              </a:lnSpc>
+              <a:spcBef>
+                <a:spcPts val="0"/>
+              </a:spcBef>
+              <a:spcAft>
+                <a:spcPts val="200"/>
+              </a:spcAft>
+            </a:pPr>
+            <a:r>
+              <a:rPr sz="1200" b="1" i="0">
+                <a:solidFill>
+                  <a:srgbClr val="A8323B"/>
+                </a:solidFill>
+                <a:latin typeface="Bricolage Grotesque"/>
+              </a:rPr>
+              <a:t>🎮 Repasa jugando</a:t>
+            </a:r>
+          </a:p>
+          <a:p>
+            <a:pPr algn="l">
+              <a:lnSpc>
+                <a:spcPct val="106000"/>
+              </a:lnSpc>
+              <a:spcBef>
+                <a:spcPts val="0"/>
+              </a:spcBef>
+              <a:spcAft>
+                <a:spcPts val="200"/>
+              </a:spcAft>
+            </a:pPr>
+            <a:r>
+              <a:rPr sz="1100" b="0" i="1">
+                <a:solidFill>
+                  <a:srgbClr val="6A6E78"/>
+                </a:solidFill>
+                <a:latin typeface="Inter"/>
+              </a:rPr>
+              <a:t>online op de hub</a:t>
+            </a:r>
+          </a:p>
+        </p:txBody>
+      </p:sp>
+      <p:sp>
+        <p:nvSpPr>
+          <p:cNvPr id="17" name="Rectangle 16"/>
           <p:cNvSpPr/>
           <p:nvPr/>
         </p:nvSpPr>
@@ -9224,7 +9840,7 @@
       </p:sp>
       <p:sp>
         <p:nvSpPr>
-          <p:cNvPr id="6" name="TextBox 5"/>
+          <p:cNvPr id="18" name="TextBox 17"/>
           <p:cNvSpPr txBox="1"/>
           <p:nvPr/>
         </p:nvSpPr>
@@ -9278,7 +9894,7 @@
       </p:sp>
       <p:sp>
         <p:nvSpPr>
-          <p:cNvPr id="7" name="TextBox 6"/>
+          <p:cNvPr id="19" name="TextBox 18"/>
           <p:cNvSpPr txBox="1"/>
           <p:nvPr/>
         </p:nvSpPr>
@@ -9323,7 +9939,7 @@
       </p:sp>
       <p:sp>
         <p:nvSpPr>
-          <p:cNvPr id="8" name="TextBox 7"/>
+          <p:cNvPr id="20" name="TextBox 19"/>
           <p:cNvSpPr txBox="1"/>
           <p:nvPr/>
         </p:nvSpPr>
@@ -9362,6 +9978,544 @@
                 <a:latin typeface="Inter"/>
               </a:rPr>
               <a:t>14</a:t>
+            </a:r>
+          </a:p>
+        </p:txBody>
+      </p:sp>
+    </p:spTree>
+  </p:cSld>
+  <p:clrMapOvr>
+    <a:masterClrMapping/>
+  </p:clrMapOvr>
+</p:sld>
+</file>
+
+<file path=ppt/slides/slide15.xml><?xml version="1.0" encoding="utf-8"?>
+<p:sld xmlns:a="http://schemas.openxmlformats.org/drawingml/2006/main" xmlns:p="http://schemas.openxmlformats.org/presentationml/2006/main" xmlns:r="http://schemas.openxmlformats.org/officeDocument/2006/relationships">
+  <p:cSld>
+    <p:spTree>
+      <p:nvGrpSpPr>
+        <p:cNvPr id="1" name=""/>
+        <p:cNvGrpSpPr/>
+        <p:nvPr/>
+      </p:nvGrpSpPr>
+      <p:grpSpPr/>
+      <p:sp>
+        <p:nvSpPr>
+          <p:cNvPr id="2" name="Rectangle 1"/>
+          <p:cNvSpPr/>
+          <p:nvPr/>
+        </p:nvSpPr>
+        <p:spPr>
+          <a:xfrm>
+            <a:off x="0" y="0"/>
+            <a:ext cx="12191695" cy="6858000"/>
+          </a:xfrm>
+          <a:prstGeom prst="rect">
+            <a:avLst/>
+          </a:prstGeom>
+          <a:solidFill>
+            <a:srgbClr val="241C1B"/>
+          </a:solidFill>
+          <a:ln>
+            <a:noFill/>
+          </a:ln>
+          <a:effectLst/>
+        </p:spPr>
+        <p:style>
+          <a:lnRef idx="1">
+            <a:schemeClr val="accent1"/>
+          </a:lnRef>
+          <a:fillRef idx="3">
+            <a:schemeClr val="accent1"/>
+          </a:fillRef>
+          <a:effectRef idx="2">
+            <a:schemeClr val="accent1"/>
+          </a:effectRef>
+          <a:fontRef idx="minor">
+            <a:schemeClr val="lt1"/>
+          </a:fontRef>
+        </p:style>
+        <p:txBody>
+          <a:bodyPr rtlCol="0" anchor="ctr"/>
+          <a:lstStyle/>
+          <a:p>
+            <a:pPr algn="ctr"/>
+          </a:p>
+        </p:txBody>
+      </p:sp>
+      <p:sp>
+        <p:nvSpPr>
+          <p:cNvPr id="3" name="TextBox 2"/>
+          <p:cNvSpPr txBox="1"/>
+          <p:nvPr/>
+        </p:nvSpPr>
+        <p:spPr>
+          <a:xfrm>
+            <a:off x="548640" y="457200"/>
+            <a:ext cx="10972800" cy="640080"/>
+          </a:xfrm>
+          <a:prstGeom prst="rect">
+            <a:avLst/>
+          </a:prstGeom>
+          <a:noFill/>
+        </p:spPr>
+        <p:txBody>
+          <a:bodyPr wrap="square" anchor="t" lIns="38100" rIns="38100" tIns="25400" bIns="25400">
+            <a:spAutoFit/>
+          </a:bodyPr>
+          <a:lstStyle/>
+          <a:p>
+            <a:pPr algn="l">
+              <a:lnSpc>
+                <a:spcPct val="106000"/>
+              </a:lnSpc>
+              <a:spcBef>
+                <a:spcPts val="0"/>
+              </a:spcBef>
+              <a:spcAft>
+                <a:spcPts val="200"/>
+              </a:spcAft>
+            </a:pPr>
+            <a:r>
+              <a:rPr sz="2200" b="1" i="0">
+                <a:solidFill>
+                  <a:srgbClr val="FFFFFF"/>
+                </a:solidFill>
+                <a:latin typeface="Bricolage Grotesque"/>
+              </a:rPr>
+              <a:t>Docentendossier · Unidad 1 «Presentaciones»</a:t>
+            </a:r>
+          </a:p>
+        </p:txBody>
+      </p:sp>
+      <p:sp>
+        <p:nvSpPr>
+          <p:cNvPr id="4" name="TextBox 3"/>
+          <p:cNvSpPr txBox="1"/>
+          <p:nvPr/>
+        </p:nvSpPr>
+        <p:spPr>
+          <a:xfrm>
+            <a:off x="548640" y="1280160"/>
+            <a:ext cx="11064240" cy="4937760"/>
+          </a:xfrm>
+          <a:prstGeom prst="rect">
+            <a:avLst/>
+          </a:prstGeom>
+          <a:noFill/>
+        </p:spPr>
+        <p:txBody>
+          <a:bodyPr wrap="square" anchor="t" lIns="38100" rIns="38100" tIns="25400" bIns="25400">
+            <a:spAutoFit/>
+          </a:bodyPr>
+          <a:lstStyle/>
+          <a:p>
+            <a:pPr algn="l">
+              <a:lnSpc>
+                <a:spcPct val="106000"/>
+              </a:lnSpc>
+              <a:spcBef>
+                <a:spcPts val="0"/>
+              </a:spcBef>
+              <a:spcAft>
+                <a:spcPts val="200"/>
+              </a:spcAft>
+            </a:pPr>
+            <a:r>
+              <a:rPr sz="1400" b="1" i="0">
+                <a:solidFill>
+                  <a:srgbClr val="FBEAEC"/>
+                </a:solidFill>
+                <a:latin typeface="Bricolage Grotesque"/>
+              </a:rPr>
+              <a:t>Timing (2 lesuren van 50 min).</a:t>
+            </a:r>
+          </a:p>
+          <a:p>
+            <a:pPr algn="l">
+              <a:lnSpc>
+                <a:spcPct val="106000"/>
+              </a:lnSpc>
+              <a:spcBef>
+                <a:spcPts val="0"/>
+              </a:spcBef>
+              <a:spcAft>
+                <a:spcPts val="200"/>
+              </a:spcAft>
+            </a:pPr>
+            <a:r>
+              <a:rPr sz="1250" b="0" i="0">
+                <a:solidFill>
+                  <a:srgbClr val="ECEAE3"/>
+                </a:solidFill>
+                <a:latin typeface="Inter"/>
+              </a:rPr>
+              <a:t>Les 1: Escucha + Kit (saludos/presentarse) + eerste práctica. Les 2: gramática functioneel, hablar, tarea + música.</a:t>
+            </a:r>
+          </a:p>
+          <a:p>
+            <a:pPr algn="l">
+              <a:lnSpc>
+                <a:spcPct val="106000"/>
+              </a:lnSpc>
+              <a:spcBef>
+                <a:spcPts val="0"/>
+              </a:spcBef>
+              <a:spcAft>
+                <a:spcPts val="200"/>
+              </a:spcAft>
+            </a:pPr>
+            <a:r>
+              <a:rPr sz="600" b="0" i="0">
+                <a:solidFill>
+                  <a:srgbClr val="20242E"/>
+                </a:solidFill>
+                <a:latin typeface="Inter"/>
+              </a:rPr>
+              <a:t/>
+            </a:r>
+          </a:p>
+          <a:p>
+            <a:pPr algn="l">
+              <a:lnSpc>
+                <a:spcPct val="106000"/>
+              </a:lnSpc>
+              <a:spcBef>
+                <a:spcPts val="0"/>
+              </a:spcBef>
+              <a:spcAft>
+                <a:spcPts val="200"/>
+              </a:spcAft>
+            </a:pPr>
+            <a:r>
+              <a:rPr sz="1400" b="1" i="0">
+                <a:solidFill>
+                  <a:srgbClr val="FBEAEC"/>
+                </a:solidFill>
+                <a:latin typeface="Bricolage Grotesque"/>
+              </a:rPr>
+              <a:t>Aanpak C4 (survival).</a:t>
+            </a:r>
+          </a:p>
+          <a:p>
+            <a:pPr algn="l">
+              <a:lnSpc>
+                <a:spcPct val="106000"/>
+              </a:lnSpc>
+              <a:spcBef>
+                <a:spcPts val="0"/>
+              </a:spcBef>
+              <a:spcAft>
+                <a:spcPts val="200"/>
+              </a:spcAft>
+            </a:pPr>
+            <a:r>
+              <a:rPr sz="1250" b="0" i="0">
+                <a:solidFill>
+                  <a:srgbClr val="ECEAE3"/>
+                </a:solidFill>
+                <a:latin typeface="Inter"/>
+              </a:rPr>
+              <a:t>Chunks komen auditief binnen (luisteren → naspreken). Grammatica enkel functioneel, geen volledige conjugatie — dat is voor het 5de. Zo krijgen de 4MOT-leerlingen voorsprong in de mechaniek zonder de leerplanstof van C5 op te gebruiken.</a:t>
+            </a:r>
+          </a:p>
+          <a:p>
+            <a:pPr algn="l">
+              <a:lnSpc>
+                <a:spcPct val="106000"/>
+              </a:lnSpc>
+              <a:spcBef>
+                <a:spcPts val="0"/>
+              </a:spcBef>
+              <a:spcAft>
+                <a:spcPts val="200"/>
+              </a:spcAft>
+            </a:pPr>
+            <a:r>
+              <a:rPr sz="600" b="0" i="0">
+                <a:solidFill>
+                  <a:srgbClr val="20242E"/>
+                </a:solidFill>
+                <a:latin typeface="Inter"/>
+              </a:rPr>
+              <a:t/>
+            </a:r>
+          </a:p>
+          <a:p>
+            <a:pPr algn="l">
+              <a:lnSpc>
+                <a:spcPct val="106000"/>
+              </a:lnSpc>
+              <a:spcBef>
+                <a:spcPts val="0"/>
+              </a:spcBef>
+              <a:spcAft>
+                <a:spcPts val="200"/>
+              </a:spcAft>
+            </a:pPr>
+            <a:r>
+              <a:rPr sz="1400" b="1" i="0">
+                <a:solidFill>
+                  <a:srgbClr val="FBEAEC"/>
+                </a:solidFill>
+                <a:latin typeface="Bricolage Grotesque"/>
+              </a:rPr>
+              <a:t>Evaluatie.</a:t>
+            </a:r>
+          </a:p>
+          <a:p>
+            <a:pPr algn="l">
+              <a:lnSpc>
+                <a:spcPct val="106000"/>
+              </a:lnSpc>
+              <a:spcBef>
+                <a:spcPts val="0"/>
+              </a:spcBef>
+              <a:spcAft>
+                <a:spcPts val="200"/>
+              </a:spcAft>
+            </a:pPr>
+            <a:r>
+              <a:rPr sz="1250" b="0" i="0">
+                <a:solidFill>
+                  <a:srgbClr val="ECEAE3"/>
+                </a:solidFill>
+                <a:latin typeface="Inter"/>
+              </a:rPr>
+              <a:t>Mondelinge mini-taak (preséntate + 3 klasgenoten) + herkennen van saludos/chunks. Geen leerplan → focus op «kunnen gebruiken in de praktijk».</a:t>
+            </a:r>
+          </a:p>
+          <a:p>
+            <a:pPr algn="l">
+              <a:lnSpc>
+                <a:spcPct val="106000"/>
+              </a:lnSpc>
+              <a:spcBef>
+                <a:spcPts val="0"/>
+              </a:spcBef>
+              <a:spcAft>
+                <a:spcPts val="200"/>
+              </a:spcAft>
+            </a:pPr>
+            <a:r>
+              <a:rPr sz="600" b="0" i="0">
+                <a:solidFill>
+                  <a:srgbClr val="20242E"/>
+                </a:solidFill>
+                <a:latin typeface="Inter"/>
+              </a:rPr>
+              <a:t/>
+            </a:r>
+          </a:p>
+          <a:p>
+            <a:pPr algn="l">
+              <a:lnSpc>
+                <a:spcPct val="106000"/>
+              </a:lnSpc>
+              <a:spcBef>
+                <a:spcPts val="0"/>
+              </a:spcBef>
+              <a:spcAft>
+                <a:spcPts val="200"/>
+              </a:spcAft>
+            </a:pPr>
+            <a:r>
+              <a:rPr sz="1150" b="0" i="1">
+                <a:solidFill>
+                  <a:srgbClr val="A6A29A"/>
+                </a:solidFill>
+                <a:latin typeface="Inter"/>
+              </a:rPr>
+              <a:t>Oplossingen staan bij elke oefendia in de presenter-notities; antwoorden verschijnen bij klik.</a:t>
+            </a:r>
+          </a:p>
+        </p:txBody>
+      </p:sp>
+      <p:sp>
+        <p:nvSpPr>
+          <p:cNvPr id="5" name="Rectangle 4"/>
+          <p:cNvSpPr/>
+          <p:nvPr/>
+        </p:nvSpPr>
+        <p:spPr>
+          <a:xfrm>
+            <a:off x="0" y="6547104"/>
+            <a:ext cx="12191695" cy="310896"/>
+          </a:xfrm>
+          <a:prstGeom prst="rect">
+            <a:avLst/>
+          </a:prstGeom>
+          <a:solidFill>
+            <a:srgbClr val="F3EEE4"/>
+          </a:solidFill>
+          <a:ln>
+            <a:noFill/>
+          </a:ln>
+          <a:effectLst/>
+        </p:spPr>
+        <p:style>
+          <a:lnRef idx="1">
+            <a:schemeClr val="accent1"/>
+          </a:lnRef>
+          <a:fillRef idx="3">
+            <a:schemeClr val="accent1"/>
+          </a:fillRef>
+          <a:effectRef idx="2">
+            <a:schemeClr val="accent1"/>
+          </a:effectRef>
+          <a:fontRef idx="minor">
+            <a:schemeClr val="lt1"/>
+          </a:fontRef>
+        </p:style>
+        <p:txBody>
+          <a:bodyPr rtlCol="0" anchor="ctr"/>
+          <a:lstStyle/>
+          <a:p>
+            <a:pPr algn="ctr"/>
+          </a:p>
+        </p:txBody>
+      </p:sp>
+      <p:sp>
+        <p:nvSpPr>
+          <p:cNvPr id="6" name="TextBox 5"/>
+          <p:cNvSpPr txBox="1"/>
+          <p:nvPr/>
+        </p:nvSpPr>
+        <p:spPr>
+          <a:xfrm>
+            <a:off x="411480" y="6565392"/>
+            <a:ext cx="5486400" cy="274320"/>
+          </a:xfrm>
+          <a:prstGeom prst="rect">
+            <a:avLst/>
+          </a:prstGeom>
+          <a:noFill/>
+        </p:spPr>
+        <p:txBody>
+          <a:bodyPr wrap="square" anchor="ctr" lIns="38100" rIns="38100" tIns="25400" bIns="25400">
+            <a:spAutoFit/>
+          </a:bodyPr>
+          <a:lstStyle/>
+          <a:p>
+            <a:pPr algn="l">
+              <a:lnSpc>
+                <a:spcPct val="106000"/>
+              </a:lnSpc>
+              <a:spcBef>
+                <a:spcPts val="0"/>
+              </a:spcBef>
+              <a:spcAft>
+                <a:spcPts val="200"/>
+              </a:spcAft>
+            </a:pPr>
+            <a:r>
+              <a:rPr sz="1100" b="1" i="0">
+                <a:solidFill>
+                  <a:srgbClr val="D64550"/>
+                </a:solidFill>
+                <a:latin typeface="Inter"/>
+              </a:rPr>
+              <a:t>● </a:t>
+            </a:r>
+            <a:r>
+              <a:rPr sz="950" b="0" i="0">
+                <a:solidFill>
+                  <a:srgbClr val="6A6E78"/>
+                </a:solidFill>
+                <a:latin typeface="Inter"/>
+              </a:rPr>
+              <a:t>U1 · PRESENTACIONES   ·   C4 · La Ruta</a:t>
+            </a:r>
+          </a:p>
+        </p:txBody>
+      </p:sp>
+      <p:sp>
+        <p:nvSpPr>
+          <p:cNvPr id="7" name="TextBox 6"/>
+          <p:cNvSpPr txBox="1"/>
+          <p:nvPr/>
+        </p:nvSpPr>
+        <p:spPr>
+          <a:xfrm>
+            <a:off x="8686800" y="6565392"/>
+            <a:ext cx="3063240" cy="274320"/>
+          </a:xfrm>
+          <a:prstGeom prst="rect">
+            <a:avLst/>
+          </a:prstGeom>
+          <a:noFill/>
+        </p:spPr>
+        <p:txBody>
+          <a:bodyPr wrap="square" anchor="ctr" lIns="38100" rIns="38100" tIns="25400" bIns="25400">
+            <a:spAutoFit/>
+          </a:bodyPr>
+          <a:lstStyle/>
+          <a:p>
+            <a:pPr algn="r">
+              <a:lnSpc>
+                <a:spcPct val="106000"/>
+              </a:lnSpc>
+              <a:spcBef>
+                <a:spcPts val="0"/>
+              </a:spcBef>
+              <a:spcAft>
+                <a:spcPts val="200"/>
+              </a:spcAft>
+            </a:pPr>
+            <a:r>
+              <a:rPr sz="900" b="0" i="1">
+                <a:solidFill>
+                  <a:srgbClr val="6A6E78"/>
+                </a:solidFill>
+                <a:latin typeface="Inter"/>
+              </a:rPr>
+              <a:t>Docentenversie — met oplossingen</a:t>
+            </a:r>
+          </a:p>
+        </p:txBody>
+      </p:sp>
+      <p:sp>
+        <p:nvSpPr>
+          <p:cNvPr id="8" name="TextBox 7"/>
+          <p:cNvSpPr txBox="1"/>
+          <p:nvPr/>
+        </p:nvSpPr>
+        <p:spPr>
+          <a:xfrm>
+            <a:off x="11475720" y="6565392"/>
+            <a:ext cx="457200" cy="274320"/>
+          </a:xfrm>
+          <a:prstGeom prst="rect">
+            <a:avLst/>
+          </a:prstGeom>
+          <a:noFill/>
+        </p:spPr>
+        <p:txBody>
+          <a:bodyPr wrap="square" anchor="ctr" lIns="38100" rIns="38100" tIns="25400" bIns="25400">
+            <a:spAutoFit/>
+          </a:bodyPr>
+          <a:lstStyle/>
+          <a:p>
+            <a:pPr algn="r">
+              <a:lnSpc>
+                <a:spcPct val="106000"/>
+              </a:lnSpc>
+              <a:spcBef>
+                <a:spcPts val="0"/>
+              </a:spcBef>
+              <a:spcAft>
+                <a:spcPts val="200"/>
+              </a:spcAft>
+            </a:pPr>
+            <a:r>
+              <a:rPr sz="950" b="1" i="0">
+                <a:solidFill>
+                  <a:srgbClr val="A8323B"/>
+                </a:solidFill>
+                <a:latin typeface="Inter"/>
+              </a:rPr>
+              <a:t>15</a:t>
             </a:r>
           </a:p>
         </p:txBody>

--- a/03-build/pptx/C4_U1_docente.pptx
+++ b/03-build/pptx/C4_U1_docente.pptx
@@ -4651,7 +4651,6 @@
               <a:srgbClr val="D64550"/>
             </a:solidFill>
           </a:ln>
-          <a:effectLst/>
           <a:effectLst>
             <a:outerShdw blurRad="90000" dist="38000" dir="5400000" rotWithShape="0">
               <a:srgbClr val="20242E">
@@ -4817,7 +4816,6 @@
               <a:srgbClr val="E4E3DE"/>
             </a:solidFill>
           </a:ln>
-          <a:effectLst/>
           <a:effectLst>
             <a:outerShdw blurRad="90000" dist="38000" dir="5400000" rotWithShape="0">
               <a:srgbClr val="20242E">
@@ -5542,7 +5540,6 @@
               <a:srgbClr val="E4E3DE"/>
             </a:solidFill>
           </a:ln>
-          <a:effectLst/>
           <a:effectLst>
             <a:outerShdw blurRad="90000" dist="38000" dir="5400000" rotWithShape="0">
               <a:srgbClr val="20242E">
@@ -5686,7 +5683,6 @@
               <a:srgbClr val="E4E3DE"/>
             </a:solidFill>
           </a:ln>
-          <a:effectLst/>
           <a:effectLst>
             <a:outerShdw blurRad="90000" dist="38000" dir="5400000" rotWithShape="0">
               <a:srgbClr val="20242E">
@@ -5830,7 +5826,6 @@
               <a:srgbClr val="E4E3DE"/>
             </a:solidFill>
           </a:ln>
-          <a:effectLst/>
           <a:effectLst>
             <a:outerShdw blurRad="90000" dist="38000" dir="5400000" rotWithShape="0">
               <a:srgbClr val="20242E">
@@ -5974,7 +5969,6 @@
               <a:srgbClr val="E4E3DE"/>
             </a:solidFill>
           </a:ln>
-          <a:effectLst/>
           <a:effectLst>
             <a:outerShdw blurRad="90000" dist="38000" dir="5400000" rotWithShape="0">
               <a:srgbClr val="20242E">
@@ -6118,7 +6112,6 @@
               <a:srgbClr val="E4E3DE"/>
             </a:solidFill>
           </a:ln>
-          <a:effectLst/>
           <a:effectLst>
             <a:outerShdw blurRad="90000" dist="38000" dir="5400000" rotWithShape="0">
               <a:srgbClr val="20242E">
@@ -6262,7 +6255,6 @@
               <a:srgbClr val="E4E3DE"/>
             </a:solidFill>
           </a:ln>
-          <a:effectLst/>
           <a:effectLst>
             <a:outerShdw blurRad="90000" dist="38000" dir="5400000" rotWithShape="0">
               <a:srgbClr val="20242E">
@@ -6406,7 +6398,6 @@
               <a:srgbClr val="D64550"/>
             </a:solidFill>
           </a:ln>
-          <a:effectLst/>
           <a:effectLst>
             <a:outerShdw blurRad="90000" dist="38000" dir="5400000" rotWithShape="0">
               <a:srgbClr val="20242E">
@@ -7043,7 +7034,6 @@
               <a:srgbClr val="D64550"/>
             </a:solidFill>
           </a:ln>
-          <a:effectLst/>
           <a:effectLst>
             <a:outerShdw blurRad="90000" dist="38000" dir="5400000" rotWithShape="0">
               <a:srgbClr val="20242E">
@@ -7303,7 +7293,6 @@
               <a:srgbClr val="D64550"/>
             </a:solidFill>
           </a:ln>
-          <a:effectLst/>
           <a:effectLst>
             <a:outerShdw blurRad="90000" dist="38000" dir="5400000" rotWithShape="0">
               <a:srgbClr val="20242E">
@@ -8082,7 +8071,6 @@
               <a:srgbClr val="D64550"/>
             </a:solidFill>
           </a:ln>
-          <a:effectLst/>
           <a:effectLst>
             <a:outerShdw blurRad="90000" dist="38000" dir="5400000" rotWithShape="0">
               <a:srgbClr val="20242E">
@@ -8236,7 +8224,6 @@
               <a:srgbClr val="D64550"/>
             </a:solidFill>
           </a:ln>
-          <a:effectLst/>
           <a:effectLst>
             <a:outerShdw blurRad="90000" dist="38000" dir="5400000" rotWithShape="0">
               <a:srgbClr val="20242E">
@@ -8390,7 +8377,6 @@
               <a:srgbClr val="D64550"/>
             </a:solidFill>
           </a:ln>
-          <a:effectLst/>
           <a:effectLst>
             <a:outerShdw blurRad="90000" dist="38000" dir="5400000" rotWithShape="0">
               <a:srgbClr val="20242E">
@@ -8544,7 +8530,6 @@
               <a:srgbClr val="D64550"/>
             </a:solidFill>
           </a:ln>
-          <a:effectLst/>
           <a:effectLst>
             <a:outerShdw blurRad="90000" dist="38000" dir="5400000" rotWithShape="0">
               <a:srgbClr val="20242E">
@@ -9181,7 +9166,6 @@
               <a:srgbClr val="E4E3DE"/>
             </a:solidFill>
           </a:ln>
-          <a:effectLst/>
           <a:effectLst>
             <a:outerShdw blurRad="90000" dist="38000" dir="5400000" rotWithShape="0">
               <a:srgbClr val="20242E">
@@ -9435,7 +9419,6 @@
               <a:srgbClr val="D64550"/>
             </a:solidFill>
           </a:ln>
-          <a:effectLst/>
           <a:effectLst>
             <a:outerShdw blurRad="90000" dist="38000" dir="5400000" rotWithShape="0">
               <a:srgbClr val="20242E">
@@ -10841,7 +10824,6 @@
               <a:srgbClr val="E4E3DE"/>
             </a:solidFill>
           </a:ln>
-          <a:effectLst/>
           <a:effectLst>
             <a:outerShdw blurRad="90000" dist="38000" dir="5400000" rotWithShape="0">
               <a:srgbClr val="20242E">
@@ -11010,7 +10992,6 @@
               <a:srgbClr val="E4E3DE"/>
             </a:solidFill>
           </a:ln>
-          <a:effectLst/>
           <a:effectLst>
             <a:outerShdw blurRad="90000" dist="38000" dir="5400000" rotWithShape="0">
               <a:srgbClr val="20242E">
@@ -11179,7 +11160,6 @@
               <a:srgbClr val="E4E3DE"/>
             </a:solidFill>
           </a:ln>
-          <a:effectLst/>
           <a:effectLst>
             <a:outerShdw blurRad="90000" dist="38000" dir="5400000" rotWithShape="0">
               <a:srgbClr val="20242E">
@@ -11348,7 +11328,6 @@
               <a:srgbClr val="E4E3DE"/>
             </a:solidFill>
           </a:ln>
-          <a:effectLst/>
           <a:effectLst>
             <a:outerShdw blurRad="90000" dist="38000" dir="5400000" rotWithShape="0">
               <a:srgbClr val="20242E">
@@ -11517,7 +11496,6 @@
               <a:srgbClr val="E4E3DE"/>
             </a:solidFill>
           </a:ln>
-          <a:effectLst/>
           <a:effectLst>
             <a:outerShdw blurRad="90000" dist="38000" dir="5400000" rotWithShape="0">
               <a:srgbClr val="20242E">
@@ -11686,7 +11664,6 @@
               <a:srgbClr val="E4E3DE"/>
             </a:solidFill>
           </a:ln>
-          <a:effectLst/>
           <a:effectLst>
             <a:outerShdw blurRad="90000" dist="38000" dir="5400000" rotWithShape="0">
               <a:srgbClr val="20242E">
@@ -11855,7 +11832,6 @@
               <a:srgbClr val="E4E3DE"/>
             </a:solidFill>
           </a:ln>
-          <a:effectLst/>
           <a:effectLst>
             <a:outerShdw blurRad="90000" dist="38000" dir="5400000" rotWithShape="0">
               <a:srgbClr val="20242E">
@@ -12024,7 +12000,6 @@
               <a:srgbClr val="E4E3DE"/>
             </a:solidFill>
           </a:ln>
-          <a:effectLst/>
           <a:effectLst>
             <a:outerShdw blurRad="90000" dist="38000" dir="5400000" rotWithShape="0">
               <a:srgbClr val="20242E">
@@ -12193,7 +12168,6 @@
               <a:srgbClr val="E4E3DE"/>
             </a:solidFill>
           </a:ln>
-          <a:effectLst/>
           <a:effectLst>
             <a:outerShdw blurRad="90000" dist="38000" dir="5400000" rotWithShape="0">
               <a:srgbClr val="20242E">
@@ -12942,7 +12916,6 @@
               <a:srgbClr val="E4E3DE"/>
             </a:solidFill>
           </a:ln>
-          <a:effectLst/>
           <a:effectLst>
             <a:outerShdw blurRad="90000" dist="38000" dir="5400000" rotWithShape="0">
               <a:srgbClr val="20242E">
@@ -13797,7 +13770,6 @@
               <a:srgbClr val="D64550"/>
             </a:solidFill>
           </a:ln>
-          <a:effectLst/>
           <a:effectLst>
             <a:outerShdw blurRad="90000" dist="38000" dir="5400000" rotWithShape="0">
               <a:srgbClr val="20242E">
@@ -14546,7 +14518,6 @@
               <a:srgbClr val="E4E3DE"/>
             </a:solidFill>
           </a:ln>
-          <a:effectLst/>
           <a:effectLst>
             <a:outerShdw blurRad="90000" dist="38000" dir="5400000" rotWithShape="0">
               <a:srgbClr val="20242E">
@@ -14757,7 +14728,6 @@
               <a:srgbClr val="E4E3DE"/>
             </a:solidFill>
           </a:ln>
-          <a:effectLst/>
           <a:effectLst>
             <a:outerShdw blurRad="90000" dist="38000" dir="5400000" rotWithShape="0">
               <a:srgbClr val="20242E">
@@ -14968,7 +14938,6 @@
               <a:srgbClr val="E4E3DE"/>
             </a:solidFill>
           </a:ln>
-          <a:effectLst/>
           <a:effectLst>
             <a:outerShdw blurRad="90000" dist="38000" dir="5400000" rotWithShape="0">
               <a:srgbClr val="20242E">
@@ -15179,7 +15148,6 @@
               <a:srgbClr val="E4E3DE"/>
             </a:solidFill>
           </a:ln>
-          <a:effectLst/>
           <a:effectLst>
             <a:outerShdw blurRad="90000" dist="38000" dir="5400000" rotWithShape="0">
               <a:srgbClr val="20242E">
@@ -15390,7 +15358,6 @@
               <a:srgbClr val="E4E3DE"/>
             </a:solidFill>
           </a:ln>
-          <a:effectLst/>
           <a:effectLst>
             <a:outerShdw blurRad="90000" dist="38000" dir="5400000" rotWithShape="0">
               <a:srgbClr val="20242E">
@@ -15601,7 +15568,6 @@
               <a:srgbClr val="D64550"/>
             </a:solidFill>
           </a:ln>
-          <a:effectLst/>
           <a:effectLst>
             <a:outerShdw blurRad="90000" dist="38000" dir="5400000" rotWithShape="0">
               <a:srgbClr val="20242E">
@@ -16454,7 +16420,6 @@
               <a:srgbClr val="E4E3DE"/>
             </a:solidFill>
           </a:ln>
-          <a:effectLst/>
           <a:effectLst>
             <a:outerShdw blurRad="90000" dist="38000" dir="5400000" rotWithShape="0">
               <a:srgbClr val="20242E">
@@ -16824,7 +16789,6 @@
               <a:srgbClr val="E4E3DE"/>
             </a:solidFill>
           </a:ln>
-          <a:effectLst/>
           <a:effectLst>
             <a:outerShdw blurRad="90000" dist="38000" dir="5400000" rotWithShape="0">
               <a:srgbClr val="20242E">
@@ -17140,7 +17104,6 @@
               <a:srgbClr val="E4E3DE"/>
             </a:solidFill>
           </a:ln>
-          <a:effectLst/>
           <a:effectLst>
             <a:outerShdw blurRad="90000" dist="38000" dir="5400000" rotWithShape="0">
               <a:srgbClr val="20242E">
@@ -18038,7 +18001,6 @@
               <a:srgbClr val="D64550"/>
             </a:solidFill>
           </a:ln>
-          <a:effectLst/>
           <a:effectLst>
             <a:outerShdw blurRad="90000" dist="38000" dir="5400000" rotWithShape="0">
               <a:srgbClr val="20242E">
@@ -18408,7 +18370,6 @@
               <a:srgbClr val="E4E3DE"/>
             </a:solidFill>
           </a:ln>
-          <a:effectLst/>
           <a:effectLst>
             <a:outerShdw blurRad="90000" dist="38000" dir="5400000" rotWithShape="0">
               <a:srgbClr val="20242E">
@@ -19806,7 +19767,6 @@
               <a:srgbClr val="E4E3DE"/>
             </a:solidFill>
           </a:ln>
-          <a:effectLst/>
           <a:effectLst>
             <a:outerShdw blurRad="90000" dist="38000" dir="5400000" rotWithShape="0">
               <a:srgbClr val="20242E">
@@ -20095,7 +20055,6 @@
               <a:srgbClr val="E4E3DE"/>
             </a:solidFill>
           </a:ln>
-          <a:effectLst/>
           <a:effectLst>
             <a:outerShdw blurRad="90000" dist="38000" dir="5400000" rotWithShape="0">
               <a:srgbClr val="20242E">
@@ -20384,7 +20343,6 @@
               <a:srgbClr val="D64550"/>
             </a:solidFill>
           </a:ln>
-          <a:effectLst/>
           <a:effectLst>
             <a:outerShdw blurRad="90000" dist="38000" dir="5400000" rotWithShape="0">
               <a:srgbClr val="20242E">
@@ -21497,7 +21455,6 @@
               <a:srgbClr val="E4E3DE"/>
             </a:solidFill>
           </a:ln>
-          <a:effectLst/>
           <a:effectLst>
             <a:outerShdw blurRad="90000" dist="38000" dir="5400000" rotWithShape="0">
               <a:srgbClr val="20242E">
@@ -21641,7 +21598,6 @@
               <a:srgbClr val="E4E3DE"/>
             </a:solidFill>
           </a:ln>
-          <a:effectLst/>
           <a:effectLst>
             <a:outerShdw blurRad="90000" dist="38000" dir="5400000" rotWithShape="0">
               <a:srgbClr val="20242E">
@@ -21785,7 +21741,6 @@
               <a:srgbClr val="E4E3DE"/>
             </a:solidFill>
           </a:ln>
-          <a:effectLst/>
           <a:effectLst>
             <a:outerShdw blurRad="90000" dist="38000" dir="5400000" rotWithShape="0">
               <a:srgbClr val="20242E">
@@ -22493,7 +22448,6 @@
               <a:srgbClr val="E4E3DE"/>
             </a:solidFill>
           </a:ln>
-          <a:effectLst/>
           <a:effectLst>
             <a:outerShdw blurRad="90000" dist="38000" dir="5400000" rotWithShape="0">
               <a:srgbClr val="20242E">
